--- a/documents/presentation/UniShare_Presentation.pptx
+++ b/documents/presentation/UniShare_Presentation.pptx
@@ -18,7 +18,6 @@
     <p:sldId id="263" r:id="rId11"/>
     <p:sldId id="264" r:id="rId12"/>
     <p:sldId id="265" r:id="rId13"/>
-    <p:sldId id="266" r:id="rId14"/>
   </p:sldIdLst>
   <p:sldSz cx="9144000" cy="5143500"/>
   <p:notesSz cx="5143500" cy="9144000"/>
@@ -70,24 +69,36 @@
             <a:noAutofit/>
           </a:bodyPr>
           <a:p>
-            <a:r>
-              <a:rPr b="0" lang="en-US" sz="1800" strike="noStrike" u="none">
-                <a:solidFill>
-                  <a:schemeClr val="dk1"/>
-                </a:solidFill>
-                <a:effectLst/>
-                <a:uFillTx/>
-                <a:latin typeface="Calibri"/>
-              </a:rPr>
-              <a:t>Click to move the slide</a:t>
-            </a:r>
-            <a:endParaRPr b="0" lang="en-US" sz="1800" strike="noStrike" u="none">
-              <a:solidFill>
-                <a:schemeClr val="dk1"/>
-              </a:solidFill>
-              <a:effectLst/>
-              <a:uFillTx/>
-              <a:latin typeface="Calibri"/>
+            <a:pPr algn="ctr"/>
+            <a:r>
+              <a:rPr b="0" lang="en-US" sz="4400" strike="noStrike" u="none">
+                <a:solidFill>
+                  <a:srgbClr val="000000"/>
+                </a:solidFill>
+                <a:effectLst/>
+                <a:uFillTx/>
+                <a:latin typeface="Arial"/>
+              </a:rPr>
+              <a:t>Click to move </a:t>
+            </a:r>
+            <a:r>
+              <a:rPr b="0" lang="en-US" sz="4400" strike="noStrike" u="none">
+                <a:solidFill>
+                  <a:srgbClr val="000000"/>
+                </a:solidFill>
+                <a:effectLst/>
+                <a:uFillTx/>
+                <a:latin typeface="Arial"/>
+              </a:rPr>
+              <a:t>the slide</a:t>
+            </a:r>
+            <a:endParaRPr b="0" lang="en-US" sz="4400" strike="noStrike" u="none">
+              <a:solidFill>
+                <a:srgbClr val="000000"/>
+              </a:solidFill>
+              <a:effectLst/>
+              <a:uFillTx/>
+              <a:latin typeface="Arial"/>
             </a:endParaRPr>
           </a:p>
         </p:txBody>
@@ -374,7 +385,7 @@
             <a:pPr indent="0" algn="r">
               <a:buNone/>
             </a:pPr>
-            <a:fld id="{BB1DB076-066C-425D-8252-A033D5A6B0DC}" type="slidenum">
+            <a:fld id="{C6E4850C-2091-4D94-A82F-B9DA86107C34}" type="slidenum">
               <a:rPr b="0" lang="en-US" sz="1400" strike="noStrike" u="none">
                 <a:solidFill>
                   <a:srgbClr val="000000"/>
@@ -421,7 +432,7 @@
       </p:grpSpPr>
       <p:sp>
         <p:nvSpPr>
-          <p:cNvPr id="135" name="PlaceHolder 1"/>
+          <p:cNvPr id="111" name="PlaceHolder 1"/>
           <p:cNvSpPr>
             <a:spLocks noGrp="1"/>
           </p:cNvSpPr>
@@ -432,19 +443,19 @@
         <p:spPr>
           <a:xfrm>
             <a:off x="685800" y="1143000"/>
-            <a:ext cx="5486040" cy="3085920"/>
-          </a:xfrm>
-          <a:prstGeom prst="rect">
-            <a:avLst/>
-          </a:prstGeom>
-          <a:ln w="0">
-            <a:noFill/>
-          </a:ln>
-        </p:spPr>
-      </p:sp>
-      <p:sp>
-        <p:nvSpPr>
-          <p:cNvPr id="136" name="PlaceHolder 2"/>
+            <a:ext cx="5485320" cy="3085200"/>
+          </a:xfrm>
+          <a:prstGeom prst="rect">
+            <a:avLst/>
+          </a:prstGeom>
+          <a:ln w="0">
+            <a:noFill/>
+          </a:ln>
+        </p:spPr>
+      </p:sp>
+      <p:sp>
+        <p:nvSpPr>
+          <p:cNvPr id="112" name="PlaceHolder 2"/>
           <p:cNvSpPr>
             <a:spLocks noGrp="1"/>
           </p:cNvSpPr>
@@ -455,7 +466,7 @@
         <p:spPr>
           <a:xfrm>
             <a:off x="685800" y="4400640"/>
-            <a:ext cx="5486040" cy="3600000"/>
+            <a:ext cx="5485320" cy="3599280"/>
           </a:xfrm>
           <a:prstGeom prst="rect">
             <a:avLst/>
@@ -486,7 +497,7 @@
       </p:sp>
       <p:sp>
         <p:nvSpPr>
-          <p:cNvPr id="137" name="PlaceHolder 3"/>
+          <p:cNvPr id="113" name="PlaceHolder 3"/>
           <p:cNvSpPr>
             <a:spLocks noGrp="1"/>
           </p:cNvSpPr>
@@ -497,7 +508,7 @@
         <p:spPr>
           <a:xfrm>
             <a:off x="3884760" y="8685360"/>
-            <a:ext cx="2971440" cy="458280"/>
+            <a:ext cx="2970720" cy="457560"/>
           </a:xfrm>
           <a:prstGeom prst="rect">
             <a:avLst/>
@@ -517,6 +528,9 @@
                 <a:spcPct val="100000"/>
               </a:lnSpc>
               <a:buNone/>
+              <a:tabLst>
+                <a:tab algn="l" pos="0"/>
+              </a:tabLst>
               <a:defRPr b="0" lang="en-US" sz="1200" strike="noStrike" u="none">
                 <a:solidFill>
                   <a:schemeClr val="dk1"/>
@@ -534,8 +548,11 @@
                 <a:spcPct val="100000"/>
               </a:lnSpc>
               <a:buNone/>
-            </a:pPr>
-            <a:fld id="{EB783080-B9F0-455B-BC49-10C0E08A8C0D}" type="slidenum">
+              <a:tabLst>
+                <a:tab algn="l" pos="0"/>
+              </a:tabLst>
+            </a:pPr>
+            <a:fld id="{92A6DB15-A13A-4587-9891-AD71C5E230E9}" type="slidenum">
               <a:rPr b="0" lang="en-US" sz="1200" strike="noStrike" u="none">
                 <a:solidFill>
                   <a:schemeClr val="dk1"/>
@@ -582,7 +599,7 @@
       </p:grpSpPr>
       <p:sp>
         <p:nvSpPr>
-          <p:cNvPr id="156" name="PlaceHolder 1"/>
+          <p:cNvPr id="132" name="PlaceHolder 1"/>
           <p:cNvSpPr>
             <a:spLocks noGrp="1"/>
           </p:cNvSpPr>
@@ -593,19 +610,19 @@
         <p:spPr>
           <a:xfrm>
             <a:off x="685800" y="1143000"/>
-            <a:ext cx="5486040" cy="3085920"/>
-          </a:xfrm>
-          <a:prstGeom prst="rect">
-            <a:avLst/>
-          </a:prstGeom>
-          <a:ln w="0">
-            <a:noFill/>
-          </a:ln>
-        </p:spPr>
-      </p:sp>
-      <p:sp>
-        <p:nvSpPr>
-          <p:cNvPr id="157" name="PlaceHolder 2"/>
+            <a:ext cx="5485320" cy="3085200"/>
+          </a:xfrm>
+          <a:prstGeom prst="rect">
+            <a:avLst/>
+          </a:prstGeom>
+          <a:ln w="0">
+            <a:noFill/>
+          </a:ln>
+        </p:spPr>
+      </p:sp>
+      <p:sp>
+        <p:nvSpPr>
+          <p:cNvPr id="133" name="PlaceHolder 2"/>
           <p:cNvSpPr>
             <a:spLocks noGrp="1"/>
           </p:cNvSpPr>
@@ -616,7 +633,7 @@
         <p:spPr>
           <a:xfrm>
             <a:off x="685800" y="4400640"/>
-            <a:ext cx="5486040" cy="3600000"/>
+            <a:ext cx="5485320" cy="3599280"/>
           </a:xfrm>
           <a:prstGeom prst="rect">
             <a:avLst/>
@@ -647,7 +664,7 @@
       </p:sp>
       <p:sp>
         <p:nvSpPr>
-          <p:cNvPr id="158" name="PlaceHolder 3"/>
+          <p:cNvPr id="134" name="PlaceHolder 3"/>
           <p:cNvSpPr>
             <a:spLocks noGrp="1"/>
           </p:cNvSpPr>
@@ -658,7 +675,7 @@
         <p:spPr>
           <a:xfrm>
             <a:off x="3884760" y="8685360"/>
-            <a:ext cx="2971440" cy="458280"/>
+            <a:ext cx="2970720" cy="457560"/>
           </a:xfrm>
           <a:prstGeom prst="rect">
             <a:avLst/>
@@ -678,6 +695,9 @@
                 <a:spcPct val="100000"/>
               </a:lnSpc>
               <a:buNone/>
+              <a:tabLst>
+                <a:tab algn="l" pos="0"/>
+              </a:tabLst>
               <a:defRPr b="0" lang="en-US" sz="1200" strike="noStrike" u="none">
                 <a:solidFill>
                   <a:schemeClr val="dk1"/>
@@ -695,169 +715,11 @@
                 <a:spcPct val="100000"/>
               </a:lnSpc>
               <a:buNone/>
-            </a:pPr>
-            <a:fld id="{CB17740C-6B9E-4F2A-95A8-282499FC90A2}" type="slidenum">
-              <a:rPr b="0" lang="en-US" sz="1200" strike="noStrike" u="none">
-                <a:solidFill>
-                  <a:schemeClr val="dk1"/>
-                </a:solidFill>
-                <a:effectLst/>
-                <a:uFillTx/>
-                <a:latin typeface="+mn-lt"/>
-                <a:ea typeface="+mn-ea"/>
-              </a:rPr>
-              <a:t>1</a:t>
-            </a:fld>
-            <a:endParaRPr b="0" lang="en-US" sz="1200" strike="noStrike" u="none">
-              <a:solidFill>
-                <a:srgbClr val="000000"/>
-              </a:solidFill>
-              <a:effectLst/>
-              <a:uFillTx/>
-              <a:latin typeface="Times New Roman"/>
-            </a:endParaRPr>
-          </a:p>
-        </p:txBody>
-      </p:sp>
-    </p:spTree>
-  </p:cSld>
-</p:notes>
-</file>
-
-<file path=ppt/notesSlides/notesSlide11.xml><?xml version="1.0" encoding="utf-8"?>
-<p:notes xmlns:a="http://schemas.openxmlformats.org/drawingml/2006/main" xmlns:p="http://schemas.openxmlformats.org/presentationml/2006/main" xmlns:r="http://schemas.openxmlformats.org/officeDocument/2006/relationships" xmlns:p14="http://schemas.microsoft.com/office/powerpoint/2010/main" xmlns:p15="http://schemas.microsoft.com/office/powerpoint/2012/main" xmlns:mc="http://schemas.openxmlformats.org/markup-compatibility/2006">
-  <p:cSld>
-    <p:spTree>
-      <p:nvGrpSpPr>
-        <p:cNvPr id="1" name=""/>
-        <p:cNvGrpSpPr/>
-        <p:nvPr/>
-      </p:nvGrpSpPr>
-      <p:grpSpPr>
-        <a:xfrm>
-          <a:off x="0" y="0"/>
-          <a:ext cx="0" cy="0"/>
-          <a:chOff x="0" y="0"/>
-          <a:chExt cx="0" cy="0"/>
-        </a:xfrm>
-      </p:grpSpPr>
-      <p:sp>
-        <p:nvSpPr>
-          <p:cNvPr id="159" name="PlaceHolder 1"/>
-          <p:cNvSpPr>
-            <a:spLocks noGrp="1"/>
-          </p:cNvSpPr>
-          <p:nvPr>
-            <p:ph type="sldImg"/>
-          </p:nvPr>
-        </p:nvSpPr>
-        <p:spPr>
-          <a:xfrm>
-            <a:off x="685800" y="1143000"/>
-            <a:ext cx="5486040" cy="3085920"/>
-          </a:xfrm>
-          <a:prstGeom prst="rect">
-            <a:avLst/>
-          </a:prstGeom>
-          <a:ln w="0">
-            <a:noFill/>
-          </a:ln>
-        </p:spPr>
-      </p:sp>
-      <p:sp>
-        <p:nvSpPr>
-          <p:cNvPr id="160" name="PlaceHolder 2"/>
-          <p:cNvSpPr>
-            <a:spLocks noGrp="1"/>
-          </p:cNvSpPr>
-          <p:nvPr>
-            <p:ph type="body"/>
-          </p:nvPr>
-        </p:nvSpPr>
-        <p:spPr>
-          <a:xfrm>
-            <a:off x="685800" y="4400640"/>
-            <a:ext cx="5486040" cy="3600000"/>
-          </a:xfrm>
-          <a:prstGeom prst="rect">
-            <a:avLst/>
-          </a:prstGeom>
-          <a:noFill/>
-          <a:ln w="0">
-            <a:noFill/>
-          </a:ln>
-        </p:spPr>
-        <p:txBody>
-          <a:bodyPr lIns="91440" rIns="91440" tIns="45720" bIns="45720" anchor="t">
-            <a:noAutofit/>
-          </a:bodyPr>
-          <a:p>
-            <a:pPr indent="0">
-              <a:buNone/>
-            </a:pPr>
-            <a:endParaRPr b="0" lang="en-US" sz="1800" strike="noStrike" u="none">
-              <a:solidFill>
-                <a:srgbClr val="000000"/>
-              </a:solidFill>
-              <a:effectLst/>
-              <a:uFillTx/>
-              <a:latin typeface="Arial"/>
-            </a:endParaRPr>
-          </a:p>
-        </p:txBody>
-      </p:sp>
-      <p:sp>
-        <p:nvSpPr>
-          <p:cNvPr id="161" name="PlaceHolder 3"/>
-          <p:cNvSpPr>
-            <a:spLocks noGrp="1"/>
-          </p:cNvSpPr>
-          <p:nvPr>
-            <p:ph type="sldNum" idx="12"/>
-          </p:nvPr>
-        </p:nvSpPr>
-        <p:spPr>
-          <a:xfrm>
-            <a:off x="3884760" y="8685360"/>
-            <a:ext cx="2971440" cy="458280"/>
-          </a:xfrm>
-          <a:prstGeom prst="rect">
-            <a:avLst/>
-          </a:prstGeom>
-          <a:noFill/>
-          <a:ln w="0">
-            <a:noFill/>
-          </a:ln>
-        </p:spPr>
-        <p:txBody>
-          <a:bodyPr lIns="91440" rIns="91440" tIns="45720" bIns="45720" anchor="b">
-            <a:noAutofit/>
-          </a:bodyPr>
-          <a:lstStyle>
-            <a:lvl1pPr indent="0" algn="r" defTabSz="914400">
-              <a:lnSpc>
-                <a:spcPct val="100000"/>
-              </a:lnSpc>
-              <a:buNone/>
-              <a:defRPr b="0" lang="en-US" sz="1200" strike="noStrike" u="none">
-                <a:solidFill>
-                  <a:schemeClr val="dk1"/>
-                </a:solidFill>
-                <a:effectLst/>
-                <a:uFillTx/>
-                <a:latin typeface="+mn-lt"/>
-                <a:ea typeface="+mn-ea"/>
-              </a:defRPr>
-            </a:lvl1pPr>
-          </a:lstStyle>
-          <a:p>
-            <a:pPr indent="0" algn="r" defTabSz="914400">
-              <a:lnSpc>
-                <a:spcPct val="100000"/>
-              </a:lnSpc>
-              <a:buNone/>
-            </a:pPr>
-            <a:fld id="{D46B4FF4-A1D0-4ECE-A37C-6FA8155685E4}" type="slidenum">
+              <a:tabLst>
+                <a:tab algn="l" pos="0"/>
+              </a:tabLst>
+            </a:pPr>
+            <a:fld id="{BE0F323E-B15F-4851-A2C3-D75BB267C925}" type="slidenum">
               <a:rPr b="0" lang="en-US" sz="1200" strike="noStrike" u="none">
                 <a:solidFill>
                   <a:schemeClr val="dk1"/>
@@ -904,7 +766,7 @@
       </p:grpSpPr>
       <p:sp>
         <p:nvSpPr>
-          <p:cNvPr id="138" name="PlaceHolder 1"/>
+          <p:cNvPr id="114" name="PlaceHolder 1"/>
           <p:cNvSpPr>
             <a:spLocks noGrp="1"/>
           </p:cNvSpPr>
@@ -915,19 +777,19 @@
         <p:spPr>
           <a:xfrm>
             <a:off x="685800" y="1143000"/>
-            <a:ext cx="5486040" cy="3085920"/>
-          </a:xfrm>
-          <a:prstGeom prst="rect">
-            <a:avLst/>
-          </a:prstGeom>
-          <a:ln w="0">
-            <a:noFill/>
-          </a:ln>
-        </p:spPr>
-      </p:sp>
-      <p:sp>
-        <p:nvSpPr>
-          <p:cNvPr id="139" name="PlaceHolder 2"/>
+            <a:ext cx="5485320" cy="3085200"/>
+          </a:xfrm>
+          <a:prstGeom prst="rect">
+            <a:avLst/>
+          </a:prstGeom>
+          <a:ln w="0">
+            <a:noFill/>
+          </a:ln>
+        </p:spPr>
+      </p:sp>
+      <p:sp>
+        <p:nvSpPr>
+          <p:cNvPr id="115" name="PlaceHolder 2"/>
           <p:cNvSpPr>
             <a:spLocks noGrp="1"/>
           </p:cNvSpPr>
@@ -938,7 +800,7 @@
         <p:spPr>
           <a:xfrm>
             <a:off x="685800" y="4400640"/>
-            <a:ext cx="5486040" cy="3600000"/>
+            <a:ext cx="5485320" cy="3599280"/>
           </a:xfrm>
           <a:prstGeom prst="rect">
             <a:avLst/>
@@ -969,7 +831,7 @@
       </p:sp>
       <p:sp>
         <p:nvSpPr>
-          <p:cNvPr id="140" name="PlaceHolder 3"/>
+          <p:cNvPr id="116" name="PlaceHolder 3"/>
           <p:cNvSpPr>
             <a:spLocks noGrp="1"/>
           </p:cNvSpPr>
@@ -980,7 +842,7 @@
         <p:spPr>
           <a:xfrm>
             <a:off x="3884760" y="8685360"/>
-            <a:ext cx="2971440" cy="458280"/>
+            <a:ext cx="2970720" cy="457560"/>
           </a:xfrm>
           <a:prstGeom prst="rect">
             <a:avLst/>
@@ -1000,6 +862,9 @@
                 <a:spcPct val="100000"/>
               </a:lnSpc>
               <a:buNone/>
+              <a:tabLst>
+                <a:tab algn="l" pos="0"/>
+              </a:tabLst>
               <a:defRPr b="0" lang="en-US" sz="1200" strike="noStrike" u="none">
                 <a:solidFill>
                   <a:schemeClr val="dk1"/>
@@ -1017,8 +882,11 @@
                 <a:spcPct val="100000"/>
               </a:lnSpc>
               <a:buNone/>
-            </a:pPr>
-            <a:fld id="{8B02872D-F94C-4173-A570-3F3495277C68}" type="slidenum">
+              <a:tabLst>
+                <a:tab algn="l" pos="0"/>
+              </a:tabLst>
+            </a:pPr>
+            <a:fld id="{DDB4A775-FA4A-4D28-AD0C-12A5586168B2}" type="slidenum">
               <a:rPr b="0" lang="en-US" sz="1200" strike="noStrike" u="none">
                 <a:solidFill>
                   <a:schemeClr val="dk1"/>
@@ -1065,7 +933,7 @@
       </p:grpSpPr>
       <p:sp>
         <p:nvSpPr>
-          <p:cNvPr id="141" name="PlaceHolder 1"/>
+          <p:cNvPr id="117" name="PlaceHolder 1"/>
           <p:cNvSpPr>
             <a:spLocks noGrp="1"/>
           </p:cNvSpPr>
@@ -1076,19 +944,19 @@
         <p:spPr>
           <a:xfrm>
             <a:off x="685800" y="1143000"/>
-            <a:ext cx="5486040" cy="3085920"/>
-          </a:xfrm>
-          <a:prstGeom prst="rect">
-            <a:avLst/>
-          </a:prstGeom>
-          <a:ln w="0">
-            <a:noFill/>
-          </a:ln>
-        </p:spPr>
-      </p:sp>
-      <p:sp>
-        <p:nvSpPr>
-          <p:cNvPr id="142" name="PlaceHolder 2"/>
+            <a:ext cx="5485320" cy="3085200"/>
+          </a:xfrm>
+          <a:prstGeom prst="rect">
+            <a:avLst/>
+          </a:prstGeom>
+          <a:ln w="0">
+            <a:noFill/>
+          </a:ln>
+        </p:spPr>
+      </p:sp>
+      <p:sp>
+        <p:nvSpPr>
+          <p:cNvPr id="118" name="PlaceHolder 2"/>
           <p:cNvSpPr>
             <a:spLocks noGrp="1"/>
           </p:cNvSpPr>
@@ -1099,7 +967,7 @@
         <p:spPr>
           <a:xfrm>
             <a:off x="685800" y="4400640"/>
-            <a:ext cx="5486040" cy="3600000"/>
+            <a:ext cx="5485320" cy="3599280"/>
           </a:xfrm>
           <a:prstGeom prst="rect">
             <a:avLst/>
@@ -1130,7 +998,7 @@
       </p:sp>
       <p:sp>
         <p:nvSpPr>
-          <p:cNvPr id="143" name="PlaceHolder 3"/>
+          <p:cNvPr id="119" name="PlaceHolder 3"/>
           <p:cNvSpPr>
             <a:spLocks noGrp="1"/>
           </p:cNvSpPr>
@@ -1141,7 +1009,7 @@
         <p:spPr>
           <a:xfrm>
             <a:off x="3884760" y="8685360"/>
-            <a:ext cx="2971440" cy="458280"/>
+            <a:ext cx="2970720" cy="457560"/>
           </a:xfrm>
           <a:prstGeom prst="rect">
             <a:avLst/>
@@ -1161,6 +1029,9 @@
                 <a:spcPct val="100000"/>
               </a:lnSpc>
               <a:buNone/>
+              <a:tabLst>
+                <a:tab algn="l" pos="0"/>
+              </a:tabLst>
               <a:defRPr b="0" lang="en-US" sz="1200" strike="noStrike" u="none">
                 <a:solidFill>
                   <a:schemeClr val="dk1"/>
@@ -1178,8 +1049,11 @@
                 <a:spcPct val="100000"/>
               </a:lnSpc>
               <a:buNone/>
-            </a:pPr>
-            <a:fld id="{96C93157-EEC6-40D4-A75A-7233F883F3AB}" type="slidenum">
+              <a:tabLst>
+                <a:tab algn="l" pos="0"/>
+              </a:tabLst>
+            </a:pPr>
+            <a:fld id="{81BA28F4-3CFB-48BE-ABD7-AE7411D54CD9}" type="slidenum">
               <a:rPr b="0" lang="en-US" sz="1200" strike="noStrike" u="none">
                 <a:solidFill>
                   <a:schemeClr val="dk1"/>
@@ -1226,7 +1100,7 @@
       </p:grpSpPr>
       <p:sp>
         <p:nvSpPr>
-          <p:cNvPr id="144" name="PlaceHolder 1"/>
+          <p:cNvPr id="120" name="PlaceHolder 1"/>
           <p:cNvSpPr>
             <a:spLocks noGrp="1"/>
           </p:cNvSpPr>
@@ -1237,19 +1111,19 @@
         <p:spPr>
           <a:xfrm>
             <a:off x="685800" y="1143000"/>
-            <a:ext cx="5486040" cy="3085920"/>
-          </a:xfrm>
-          <a:prstGeom prst="rect">
-            <a:avLst/>
-          </a:prstGeom>
-          <a:ln w="0">
-            <a:noFill/>
-          </a:ln>
-        </p:spPr>
-      </p:sp>
-      <p:sp>
-        <p:nvSpPr>
-          <p:cNvPr id="145" name="PlaceHolder 2"/>
+            <a:ext cx="5485320" cy="3085200"/>
+          </a:xfrm>
+          <a:prstGeom prst="rect">
+            <a:avLst/>
+          </a:prstGeom>
+          <a:ln w="0">
+            <a:noFill/>
+          </a:ln>
+        </p:spPr>
+      </p:sp>
+      <p:sp>
+        <p:nvSpPr>
+          <p:cNvPr id="121" name="PlaceHolder 2"/>
           <p:cNvSpPr>
             <a:spLocks noGrp="1"/>
           </p:cNvSpPr>
@@ -1260,7 +1134,7 @@
         <p:spPr>
           <a:xfrm>
             <a:off x="685800" y="4400640"/>
-            <a:ext cx="5486040" cy="3600000"/>
+            <a:ext cx="5485320" cy="3599280"/>
           </a:xfrm>
           <a:prstGeom prst="rect">
             <a:avLst/>
@@ -1291,7 +1165,7 @@
       </p:sp>
       <p:sp>
         <p:nvSpPr>
-          <p:cNvPr id="146" name="PlaceHolder 3"/>
+          <p:cNvPr id="122" name="PlaceHolder 3"/>
           <p:cNvSpPr>
             <a:spLocks noGrp="1"/>
           </p:cNvSpPr>
@@ -1302,7 +1176,7 @@
         <p:spPr>
           <a:xfrm>
             <a:off x="3884760" y="8685360"/>
-            <a:ext cx="2971440" cy="458280"/>
+            <a:ext cx="2970720" cy="457560"/>
           </a:xfrm>
           <a:prstGeom prst="rect">
             <a:avLst/>
@@ -1322,6 +1196,9 @@
                 <a:spcPct val="100000"/>
               </a:lnSpc>
               <a:buNone/>
+              <a:tabLst>
+                <a:tab algn="l" pos="0"/>
+              </a:tabLst>
               <a:defRPr b="0" lang="en-US" sz="1200" strike="noStrike" u="none">
                 <a:solidFill>
                   <a:schemeClr val="dk1"/>
@@ -1339,8 +1216,11 @@
                 <a:spcPct val="100000"/>
               </a:lnSpc>
               <a:buNone/>
-            </a:pPr>
-            <a:fld id="{A708EF66-DF8E-40CB-A710-65F55790F866}" type="slidenum">
+              <a:tabLst>
+                <a:tab algn="l" pos="0"/>
+              </a:tabLst>
+            </a:pPr>
+            <a:fld id="{34C627C7-88A3-4953-AA41-C909584CE184}" type="slidenum">
               <a:rPr b="0" lang="en-US" sz="1200" strike="noStrike" u="none">
                 <a:solidFill>
                   <a:schemeClr val="dk1"/>
@@ -1387,7 +1267,7 @@
       </p:grpSpPr>
       <p:sp>
         <p:nvSpPr>
-          <p:cNvPr id="147" name="PlaceHolder 1"/>
+          <p:cNvPr id="123" name="PlaceHolder 1"/>
           <p:cNvSpPr>
             <a:spLocks noGrp="1"/>
           </p:cNvSpPr>
@@ -1398,19 +1278,19 @@
         <p:spPr>
           <a:xfrm>
             <a:off x="685800" y="1143000"/>
-            <a:ext cx="5486040" cy="3085920"/>
-          </a:xfrm>
-          <a:prstGeom prst="rect">
-            <a:avLst/>
-          </a:prstGeom>
-          <a:ln w="0">
-            <a:noFill/>
-          </a:ln>
-        </p:spPr>
-      </p:sp>
-      <p:sp>
-        <p:nvSpPr>
-          <p:cNvPr id="148" name="PlaceHolder 2"/>
+            <a:ext cx="5485320" cy="3085200"/>
+          </a:xfrm>
+          <a:prstGeom prst="rect">
+            <a:avLst/>
+          </a:prstGeom>
+          <a:ln w="0">
+            <a:noFill/>
+          </a:ln>
+        </p:spPr>
+      </p:sp>
+      <p:sp>
+        <p:nvSpPr>
+          <p:cNvPr id="124" name="PlaceHolder 2"/>
           <p:cNvSpPr>
             <a:spLocks noGrp="1"/>
           </p:cNvSpPr>
@@ -1421,7 +1301,7 @@
         <p:spPr>
           <a:xfrm>
             <a:off x="685800" y="4400640"/>
-            <a:ext cx="5486040" cy="3600000"/>
+            <a:ext cx="5485320" cy="3599280"/>
           </a:xfrm>
           <a:prstGeom prst="rect">
             <a:avLst/>
@@ -1452,7 +1332,7 @@
       </p:sp>
       <p:sp>
         <p:nvSpPr>
-          <p:cNvPr id="149" name="PlaceHolder 3"/>
+          <p:cNvPr id="125" name="PlaceHolder 3"/>
           <p:cNvSpPr>
             <a:spLocks noGrp="1"/>
           </p:cNvSpPr>
@@ -1463,7 +1343,7 @@
         <p:spPr>
           <a:xfrm>
             <a:off x="3884760" y="8685360"/>
-            <a:ext cx="2971440" cy="458280"/>
+            <a:ext cx="2970720" cy="457560"/>
           </a:xfrm>
           <a:prstGeom prst="rect">
             <a:avLst/>
@@ -1483,6 +1363,9 @@
                 <a:spcPct val="100000"/>
               </a:lnSpc>
               <a:buNone/>
+              <a:tabLst>
+                <a:tab algn="l" pos="0"/>
+              </a:tabLst>
               <a:defRPr b="0" lang="en-US" sz="1200" strike="noStrike" u="none">
                 <a:solidFill>
                   <a:schemeClr val="dk1"/>
@@ -1500,8 +1383,11 @@
                 <a:spcPct val="100000"/>
               </a:lnSpc>
               <a:buNone/>
-            </a:pPr>
-            <a:fld id="{2751D708-F8B9-4F6B-82FB-DEDF8B2C97AC}" type="slidenum">
+              <a:tabLst>
+                <a:tab algn="l" pos="0"/>
+              </a:tabLst>
+            </a:pPr>
+            <a:fld id="{1ADDF2D9-00D5-41C6-BF75-DFE9FC99820F}" type="slidenum">
               <a:rPr b="0" lang="en-US" sz="1200" strike="noStrike" u="none">
                 <a:solidFill>
                   <a:schemeClr val="dk1"/>
@@ -1548,7 +1434,7 @@
       </p:grpSpPr>
       <p:sp>
         <p:nvSpPr>
-          <p:cNvPr id="150" name="PlaceHolder 1"/>
+          <p:cNvPr id="126" name="PlaceHolder 1"/>
           <p:cNvSpPr>
             <a:spLocks noGrp="1"/>
           </p:cNvSpPr>
@@ -1559,19 +1445,19 @@
         <p:spPr>
           <a:xfrm>
             <a:off x="685800" y="1143000"/>
-            <a:ext cx="5486040" cy="3085920"/>
-          </a:xfrm>
-          <a:prstGeom prst="rect">
-            <a:avLst/>
-          </a:prstGeom>
-          <a:ln w="0">
-            <a:noFill/>
-          </a:ln>
-        </p:spPr>
-      </p:sp>
-      <p:sp>
-        <p:nvSpPr>
-          <p:cNvPr id="151" name="PlaceHolder 2"/>
+            <a:ext cx="5485320" cy="3085200"/>
+          </a:xfrm>
+          <a:prstGeom prst="rect">
+            <a:avLst/>
+          </a:prstGeom>
+          <a:ln w="0">
+            <a:noFill/>
+          </a:ln>
+        </p:spPr>
+      </p:sp>
+      <p:sp>
+        <p:nvSpPr>
+          <p:cNvPr id="127" name="PlaceHolder 2"/>
           <p:cNvSpPr>
             <a:spLocks noGrp="1"/>
           </p:cNvSpPr>
@@ -1582,7 +1468,7 @@
         <p:spPr>
           <a:xfrm>
             <a:off x="685800" y="4400640"/>
-            <a:ext cx="5486040" cy="3600000"/>
+            <a:ext cx="5485320" cy="3599280"/>
           </a:xfrm>
           <a:prstGeom prst="rect">
             <a:avLst/>
@@ -1602,6 +1488,9 @@
                 <a:spcPct val="100000"/>
               </a:lnSpc>
               <a:buNone/>
+              <a:tabLst>
+                <a:tab algn="l" pos="0"/>
+              </a:tabLst>
             </a:pPr>
             <a:r>
               <a:rPr b="0" lang="en-US" sz="2000" strike="noStrike" u="none">
@@ -1627,7 +1516,7 @@
       </p:sp>
       <p:sp>
         <p:nvSpPr>
-          <p:cNvPr id="152" name="PlaceHolder 3"/>
+          <p:cNvPr id="128" name="PlaceHolder 3"/>
           <p:cNvSpPr>
             <a:spLocks noGrp="1"/>
           </p:cNvSpPr>
@@ -1638,7 +1527,7 @@
         <p:spPr>
           <a:xfrm>
             <a:off x="3884760" y="8685360"/>
-            <a:ext cx="2971440" cy="458280"/>
+            <a:ext cx="2970720" cy="457560"/>
           </a:xfrm>
           <a:prstGeom prst="rect">
             <a:avLst/>
@@ -1658,6 +1547,9 @@
                 <a:spcPct val="100000"/>
               </a:lnSpc>
               <a:buNone/>
+              <a:tabLst>
+                <a:tab algn="l" pos="0"/>
+              </a:tabLst>
               <a:defRPr b="0" lang="en-US" sz="1200" strike="noStrike" u="none">
                 <a:solidFill>
                   <a:schemeClr val="dk1"/>
@@ -1675,8 +1567,11 @@
                 <a:spcPct val="100000"/>
               </a:lnSpc>
               <a:buNone/>
-            </a:pPr>
-            <a:fld id="{8A2C90DA-0D3E-4A37-8039-78B78F490D71}" type="slidenum">
+              <a:tabLst>
+                <a:tab algn="l" pos="0"/>
+              </a:tabLst>
+            </a:pPr>
+            <a:fld id="{BB1D081E-D3EA-460F-87FD-928B3D6131F9}" type="slidenum">
               <a:rPr b="0" lang="en-US" sz="1200" strike="noStrike" u="none">
                 <a:solidFill>
                   <a:schemeClr val="dk1"/>
@@ -1723,7 +1618,7 @@
       </p:grpSpPr>
       <p:sp>
         <p:nvSpPr>
-          <p:cNvPr id="153" name="PlaceHolder 1"/>
+          <p:cNvPr id="129" name="PlaceHolder 1"/>
           <p:cNvSpPr>
             <a:spLocks noGrp="1"/>
           </p:cNvSpPr>
@@ -1734,19 +1629,19 @@
         <p:spPr>
           <a:xfrm>
             <a:off x="685800" y="1143000"/>
-            <a:ext cx="5486040" cy="3085920"/>
-          </a:xfrm>
-          <a:prstGeom prst="rect">
-            <a:avLst/>
-          </a:prstGeom>
-          <a:ln w="0">
-            <a:noFill/>
-          </a:ln>
-        </p:spPr>
-      </p:sp>
-      <p:sp>
-        <p:nvSpPr>
-          <p:cNvPr id="154" name="PlaceHolder 2"/>
+            <a:ext cx="5485320" cy="3085200"/>
+          </a:xfrm>
+          <a:prstGeom prst="rect">
+            <a:avLst/>
+          </a:prstGeom>
+          <a:ln w="0">
+            <a:noFill/>
+          </a:ln>
+        </p:spPr>
+      </p:sp>
+      <p:sp>
+        <p:nvSpPr>
+          <p:cNvPr id="130" name="PlaceHolder 2"/>
           <p:cNvSpPr>
             <a:spLocks noGrp="1"/>
           </p:cNvSpPr>
@@ -1757,7 +1652,7 @@
         <p:spPr>
           <a:xfrm>
             <a:off x="685800" y="4400640"/>
-            <a:ext cx="5486040" cy="3600000"/>
+            <a:ext cx="5485320" cy="3599280"/>
           </a:xfrm>
           <a:prstGeom prst="rect">
             <a:avLst/>
@@ -1788,7 +1683,7 @@
       </p:sp>
       <p:sp>
         <p:nvSpPr>
-          <p:cNvPr id="155" name="PlaceHolder 3"/>
+          <p:cNvPr id="131" name="PlaceHolder 3"/>
           <p:cNvSpPr>
             <a:spLocks noGrp="1"/>
           </p:cNvSpPr>
@@ -1799,7 +1694,7 @@
         <p:spPr>
           <a:xfrm>
             <a:off x="3884760" y="8685360"/>
-            <a:ext cx="2971440" cy="458280"/>
+            <a:ext cx="2970720" cy="457560"/>
           </a:xfrm>
           <a:prstGeom prst="rect">
             <a:avLst/>
@@ -1819,6 +1714,9 @@
                 <a:spcPct val="100000"/>
               </a:lnSpc>
               <a:buNone/>
+              <a:tabLst>
+                <a:tab algn="l" pos="0"/>
+              </a:tabLst>
               <a:defRPr b="0" lang="en-US" sz="1200" strike="noStrike" u="none">
                 <a:solidFill>
                   <a:schemeClr val="dk1"/>
@@ -1836,8 +1734,11 @@
                 <a:spcPct val="100000"/>
               </a:lnSpc>
               <a:buNone/>
-            </a:pPr>
-            <a:fld id="{B1969391-CA88-4A76-AB0E-7D9D38A382E0}" type="slidenum">
+              <a:tabLst>
+                <a:tab algn="l" pos="0"/>
+              </a:tabLst>
+            </a:pPr>
+            <a:fld id="{A2838389-C5AE-41E8-BB43-32147E41D250}" type="slidenum">
               <a:rPr b="0" lang="en-US" sz="1200" strike="noStrike" u="none">
                 <a:solidFill>
                   <a:schemeClr val="dk1"/>
@@ -1939,27 +1840,27 @@
             <a:noAutofit/>
           </a:bodyPr>
           <a:p>
-            <a:pPr indent="0">
+            <a:pPr indent="0" algn="ctr">
               <a:buNone/>
             </a:pPr>
             <a:r>
-              <a:rPr b="0" lang="en-US" sz="1800" strike="noStrike" u="none">
-                <a:solidFill>
-                  <a:schemeClr val="dk1"/>
-                </a:solidFill>
-                <a:effectLst/>
-                <a:uFillTx/>
-                <a:latin typeface="Calibri"/>
+              <a:rPr b="0" lang="en-US" sz="4400" strike="noStrike" u="none">
+                <a:solidFill>
+                  <a:srgbClr val="000000"/>
+                </a:solidFill>
+                <a:effectLst/>
+                <a:uFillTx/>
+                <a:latin typeface="Arial"/>
               </a:rPr>
               <a:t>Click to edit the title text format</a:t>
             </a:r>
-            <a:endParaRPr b="0" lang="en-US" sz="1800" strike="noStrike" u="none">
-              <a:solidFill>
-                <a:schemeClr val="dk1"/>
-              </a:solidFill>
-              <a:effectLst/>
-              <a:uFillTx/>
-              <a:latin typeface="Calibri"/>
+            <a:endParaRPr b="0" lang="en-US" sz="4400" strike="noStrike" u="none">
+              <a:solidFill>
+                <a:srgbClr val="000000"/>
+              </a:solidFill>
+              <a:effectLst/>
+              <a:uFillTx/>
+              <a:latin typeface="Arial"/>
             </a:endParaRPr>
           </a:p>
         </p:txBody>
@@ -1989,7 +1890,7 @@
         </p:spPr>
         <p:txBody>
           <a:bodyPr lIns="0" rIns="0" tIns="0" bIns="0" anchor="t">
-            <a:normAutofit lnSpcReduction="9999"/>
+            <a:normAutofit/>
           </a:bodyPr>
           <a:p>
             <a:pPr marL="432000" indent="-324000">
@@ -2006,21 +1907,21 @@
             <a:r>
               <a:rPr b="0" lang="en-US" sz="3200" strike="noStrike" u="none">
                 <a:solidFill>
-                  <a:schemeClr val="dk1"/>
-                </a:solidFill>
-                <a:effectLst/>
-                <a:uFillTx/>
-                <a:latin typeface="Calibri"/>
+                  <a:srgbClr val="000000"/>
+                </a:solidFill>
+                <a:effectLst/>
+                <a:uFillTx/>
+                <a:latin typeface="Arial"/>
               </a:rPr>
               <a:t>Click to edit the outline text format</a:t>
             </a:r>
             <a:endParaRPr b="0" lang="en-US" sz="3200" strike="noStrike" u="none">
               <a:solidFill>
-                <a:schemeClr val="dk1"/>
-              </a:solidFill>
-              <a:effectLst/>
-              <a:uFillTx/>
-              <a:latin typeface="Calibri"/>
+                <a:srgbClr val="000000"/>
+              </a:solidFill>
+              <a:effectLst/>
+              <a:uFillTx/>
+              <a:latin typeface="Arial"/>
             </a:endParaRPr>
           </a:p>
           <a:p>
@@ -2036,23 +1937,23 @@
               <a:buChar char=""/>
             </a:pPr>
             <a:r>
-              <a:rPr b="0" lang="en-US" sz="2400" strike="noStrike" u="none">
-                <a:solidFill>
-                  <a:schemeClr val="dk1"/>
-                </a:solidFill>
-                <a:effectLst/>
-                <a:uFillTx/>
-                <a:latin typeface="Calibri"/>
+              <a:rPr b="0" lang="en-US" sz="2800" strike="noStrike" u="none">
+                <a:solidFill>
+                  <a:srgbClr val="000000"/>
+                </a:solidFill>
+                <a:effectLst/>
+                <a:uFillTx/>
+                <a:latin typeface="Arial"/>
               </a:rPr>
               <a:t>Second Outline Level</a:t>
             </a:r>
-            <a:endParaRPr b="0" lang="en-US" sz="2400" strike="noStrike" u="none">
-              <a:solidFill>
-                <a:schemeClr val="dk1"/>
-              </a:solidFill>
-              <a:effectLst/>
-              <a:uFillTx/>
-              <a:latin typeface="Calibri"/>
+            <a:endParaRPr b="0" lang="en-US" sz="2800" strike="noStrike" u="none">
+              <a:solidFill>
+                <a:srgbClr val="000000"/>
+              </a:solidFill>
+              <a:effectLst/>
+              <a:uFillTx/>
+              <a:latin typeface="Arial"/>
             </a:endParaRPr>
           </a:p>
           <a:p>
@@ -2068,23 +1969,23 @@
               <a:buChar char=""/>
             </a:pPr>
             <a:r>
-              <a:rPr b="0" lang="en-US" sz="2000" strike="noStrike" u="none">
-                <a:solidFill>
-                  <a:schemeClr val="dk1"/>
-                </a:solidFill>
-                <a:effectLst/>
-                <a:uFillTx/>
-                <a:latin typeface="Calibri"/>
+              <a:rPr b="0" lang="en-US" sz="2400" strike="noStrike" u="none">
+                <a:solidFill>
+                  <a:srgbClr val="000000"/>
+                </a:solidFill>
+                <a:effectLst/>
+                <a:uFillTx/>
+                <a:latin typeface="Arial"/>
               </a:rPr>
               <a:t>Third Outline Level</a:t>
             </a:r>
-            <a:endParaRPr b="0" lang="en-US" sz="2000" strike="noStrike" u="none">
-              <a:solidFill>
-                <a:schemeClr val="dk1"/>
-              </a:solidFill>
-              <a:effectLst/>
-              <a:uFillTx/>
-              <a:latin typeface="Calibri"/>
+            <a:endParaRPr b="0" lang="en-US" sz="2400" strike="noStrike" u="none">
+              <a:solidFill>
+                <a:srgbClr val="000000"/>
+              </a:solidFill>
+              <a:effectLst/>
+              <a:uFillTx/>
+              <a:latin typeface="Arial"/>
             </a:endParaRPr>
           </a:p>
           <a:p>
@@ -2102,21 +2003,21 @@
             <a:r>
               <a:rPr b="0" lang="en-US" sz="2000" strike="noStrike" u="none">
                 <a:solidFill>
-                  <a:schemeClr val="dk1"/>
-                </a:solidFill>
-                <a:effectLst/>
-                <a:uFillTx/>
-                <a:latin typeface="Calibri"/>
+                  <a:srgbClr val="000000"/>
+                </a:solidFill>
+                <a:effectLst/>
+                <a:uFillTx/>
+                <a:latin typeface="Arial"/>
               </a:rPr>
               <a:t>Fourth Outline Level</a:t>
             </a:r>
             <a:endParaRPr b="0" lang="en-US" sz="2000" strike="noStrike" u="none">
               <a:solidFill>
-                <a:schemeClr val="dk1"/>
-              </a:solidFill>
-              <a:effectLst/>
-              <a:uFillTx/>
-              <a:latin typeface="Calibri"/>
+                <a:srgbClr val="000000"/>
+              </a:solidFill>
+              <a:effectLst/>
+              <a:uFillTx/>
+              <a:latin typeface="Arial"/>
             </a:endParaRPr>
           </a:p>
           <a:p>
@@ -2134,21 +2035,21 @@
             <a:r>
               <a:rPr b="0" lang="en-US" sz="2000" strike="noStrike" u="none">
                 <a:solidFill>
-                  <a:schemeClr val="dk1"/>
-                </a:solidFill>
-                <a:effectLst/>
-                <a:uFillTx/>
-                <a:latin typeface="Calibri"/>
+                  <a:srgbClr val="000000"/>
+                </a:solidFill>
+                <a:effectLst/>
+                <a:uFillTx/>
+                <a:latin typeface="Arial"/>
               </a:rPr>
               <a:t>Fifth Outline Level</a:t>
             </a:r>
             <a:endParaRPr b="0" lang="en-US" sz="2000" strike="noStrike" u="none">
               <a:solidFill>
-                <a:schemeClr val="dk1"/>
-              </a:solidFill>
-              <a:effectLst/>
-              <a:uFillTx/>
-              <a:latin typeface="Calibri"/>
+                <a:srgbClr val="000000"/>
+              </a:solidFill>
+              <a:effectLst/>
+              <a:uFillTx/>
+              <a:latin typeface="Arial"/>
             </a:endParaRPr>
           </a:p>
           <a:p>
@@ -2166,21 +2067,21 @@
             <a:r>
               <a:rPr b="0" lang="en-US" sz="2000" strike="noStrike" u="none">
                 <a:solidFill>
-                  <a:schemeClr val="dk1"/>
-                </a:solidFill>
-                <a:effectLst/>
-                <a:uFillTx/>
-                <a:latin typeface="Calibri"/>
+                  <a:srgbClr val="000000"/>
+                </a:solidFill>
+                <a:effectLst/>
+                <a:uFillTx/>
+                <a:latin typeface="Arial"/>
               </a:rPr>
               <a:t>Sixth Outline Level</a:t>
             </a:r>
             <a:endParaRPr b="0" lang="en-US" sz="2000" strike="noStrike" u="none">
               <a:solidFill>
-                <a:schemeClr val="dk1"/>
-              </a:solidFill>
-              <a:effectLst/>
-              <a:uFillTx/>
-              <a:latin typeface="Calibri"/>
+                <a:srgbClr val="000000"/>
+              </a:solidFill>
+              <a:effectLst/>
+              <a:uFillTx/>
+              <a:latin typeface="Arial"/>
             </a:endParaRPr>
           </a:p>
           <a:p>
@@ -2198,21 +2099,21 @@
             <a:r>
               <a:rPr b="0" lang="en-US" sz="2000" strike="noStrike" u="none">
                 <a:solidFill>
-                  <a:schemeClr val="dk1"/>
-                </a:solidFill>
-                <a:effectLst/>
-                <a:uFillTx/>
-                <a:latin typeface="Calibri"/>
+                  <a:srgbClr val="000000"/>
+                </a:solidFill>
+                <a:effectLst/>
+                <a:uFillTx/>
+                <a:latin typeface="Arial"/>
               </a:rPr>
               <a:t>Seventh Outline Level</a:t>
             </a:r>
             <a:endParaRPr b="0" lang="en-US" sz="2000" strike="noStrike" u="none">
               <a:solidFill>
-                <a:schemeClr val="dk1"/>
-              </a:solidFill>
-              <a:effectLst/>
-              <a:uFillTx/>
-              <a:latin typeface="Calibri"/>
+                <a:srgbClr val="000000"/>
+              </a:solidFill>
+              <a:effectLst/>
+              <a:uFillTx/>
+              <a:latin typeface="Arial"/>
             </a:endParaRPr>
           </a:p>
         </p:txBody>
@@ -2259,7 +2160,7 @@
         <p:spPr>
           <a:xfrm>
             <a:off x="0" y="0"/>
-            <a:ext cx="9143640" cy="54360"/>
+            <a:ext cx="9142920" cy="53640"/>
           </a:xfrm>
           <a:prstGeom prst="rect">
             <a:avLst/>
@@ -2285,6 +2186,11 @@
             <a:noAutofit/>
           </a:bodyPr>
           <a:p>
+            <a:pPr>
+              <a:lnSpc>
+                <a:spcPct val="100000"/>
+              </a:lnSpc>
+            </a:pPr>
             <a:endParaRPr b="0" lang="en-US" sz="1800" strike="noStrike" u="none">
               <a:solidFill>
                 <a:srgbClr val="000000"/>
@@ -2305,7 +2211,7 @@
         <p:spPr>
           <a:xfrm>
             <a:off x="640080" y="1005840"/>
-            <a:ext cx="7863480" cy="365400"/>
+            <a:ext cx="7862760" cy="364680"/>
           </a:xfrm>
           <a:prstGeom prst="rect">
             <a:avLst/>
@@ -2366,7 +2272,7 @@
         <p:spPr>
           <a:xfrm>
             <a:off x="640080" y="1463040"/>
-            <a:ext cx="7863480" cy="1188360"/>
+            <a:ext cx="7862760" cy="1187640"/>
           </a:xfrm>
           <a:prstGeom prst="rect">
             <a:avLst/>
@@ -2427,7 +2333,7 @@
         <p:spPr>
           <a:xfrm>
             <a:off x="640080" y="2743200"/>
-            <a:ext cx="7863480" cy="456840"/>
+            <a:ext cx="7862760" cy="456120"/>
           </a:xfrm>
           <a:prstGeom prst="rect">
             <a:avLst/>
@@ -2531,7 +2437,7 @@
         <p:spPr>
           <a:xfrm>
             <a:off x="640080" y="3566160"/>
-            <a:ext cx="7863480" cy="319680"/>
+            <a:ext cx="7862760" cy="318960"/>
           </a:xfrm>
           <a:prstGeom prst="rect">
             <a:avLst/>
@@ -2592,7 +2498,7 @@
         <p:spPr>
           <a:xfrm>
             <a:off x="640080" y="3931920"/>
-            <a:ext cx="7863480" cy="273960"/>
+            <a:ext cx="7862760" cy="273240"/>
           </a:xfrm>
           <a:prstGeom prst="rect">
             <a:avLst/>
@@ -2658,1155 +2564,6 @@
 </file>
 
 <file path=ppt/slides/slide10.xml><?xml version="1.0" encoding="utf-8"?>
-<p:sld xmlns:a="http://schemas.openxmlformats.org/drawingml/2006/main" xmlns:p="http://schemas.openxmlformats.org/presentationml/2006/main" xmlns:r="http://schemas.openxmlformats.org/officeDocument/2006/relationships" xmlns:p14="http://schemas.microsoft.com/office/powerpoint/2010/main" xmlns:p15="http://schemas.microsoft.com/office/powerpoint/2012/main" xmlns:mc="http://schemas.openxmlformats.org/markup-compatibility/2006">
-  <p:cSld>
-    <p:bg>
-      <p:bgPr>
-        <a:solidFill>
-          <a:srgbClr val="ffffff"/>
-        </a:solidFill>
-      </p:bgPr>
-    </p:bg>
-    <p:spTree>
-      <p:nvGrpSpPr>
-        <p:cNvPr id="1" name=""/>
-        <p:cNvGrpSpPr/>
-        <p:nvPr/>
-      </p:nvGrpSpPr>
-      <p:grpSpPr>
-        <a:xfrm>
-          <a:off x="0" y="0"/>
-          <a:ext cx="0" cy="0"/>
-          <a:chOff x="0" y="0"/>
-          <a:chExt cx="0" cy="0"/>
-        </a:xfrm>
-      </p:grpSpPr>
-      <p:sp>
-        <p:nvSpPr>
-          <p:cNvPr id="110" name="Text 0"/>
-          <p:cNvSpPr/>
-          <p:nvPr/>
-        </p:nvSpPr>
-        <p:spPr>
-          <a:xfrm>
-            <a:off x="502920" y="201240"/>
-            <a:ext cx="8229240" cy="292320"/>
-          </a:xfrm>
-          <a:prstGeom prst="rect">
-            <a:avLst/>
-          </a:prstGeom>
-          <a:noFill/>
-          <a:ln w="0">
-            <a:noFill/>
-          </a:ln>
-        </p:spPr>
-        <p:style>
-          <a:lnRef idx="0"/>
-          <a:fillRef idx="0"/>
-          <a:effectRef idx="0"/>
-          <a:fontRef idx="minor"/>
-        </p:style>
-        <p:txBody>
-          <a:bodyPr lIns="0" rIns="0" tIns="0" bIns="0" anchor="ctr">
-            <a:noAutofit/>
-          </a:bodyPr>
-          <a:p>
-            <a:pPr defTabSz="914400">
-              <a:lnSpc>
-                <a:spcPct val="100000"/>
-              </a:lnSpc>
-              <a:tabLst>
-                <a:tab algn="l" pos="0"/>
-              </a:tabLst>
-            </a:pPr>
-            <a:r>
-              <a:rPr b="1" lang="en-US" sz="900" spc="300" strike="noStrike" u="none">
-                <a:solidFill>
-                  <a:srgbClr val="1abc9c"/>
-                </a:solidFill>
-                <a:effectLst/>
-                <a:uFillTx/>
-                <a:latin typeface="Calibri"/>
-              </a:rPr>
-              <a:t>CONCLUSION</a:t>
-            </a:r>
-            <a:endParaRPr b="0" lang="en-US" sz="900" strike="noStrike" u="none">
-              <a:solidFill>
-                <a:srgbClr val="000000"/>
-              </a:solidFill>
-              <a:effectLst/>
-              <a:uFillTx/>
-              <a:latin typeface="Arial"/>
-            </a:endParaRPr>
-          </a:p>
-        </p:txBody>
-      </p:sp>
-      <p:sp>
-        <p:nvSpPr>
-          <p:cNvPr id="111" name="Text 1"/>
-          <p:cNvSpPr/>
-          <p:nvPr/>
-        </p:nvSpPr>
-        <p:spPr>
-          <a:xfrm>
-            <a:off x="502920" y="530280"/>
-            <a:ext cx="7772040" cy="639720"/>
-          </a:xfrm>
-          <a:prstGeom prst="rect">
-            <a:avLst/>
-          </a:prstGeom>
-          <a:noFill/>
-          <a:ln w="0">
-            <a:noFill/>
-          </a:ln>
-        </p:spPr>
-        <p:style>
-          <a:lnRef idx="0"/>
-          <a:fillRef idx="0"/>
-          <a:effectRef idx="0"/>
-          <a:fontRef idx="minor"/>
-        </p:style>
-        <p:txBody>
-          <a:bodyPr lIns="0" rIns="0" tIns="0" bIns="0" anchor="ctr">
-            <a:noAutofit/>
-          </a:bodyPr>
-          <a:p>
-            <a:pPr defTabSz="914400">
-              <a:lnSpc>
-                <a:spcPct val="100000"/>
-              </a:lnSpc>
-              <a:tabLst>
-                <a:tab algn="l" pos="0"/>
-              </a:tabLst>
-            </a:pPr>
-            <a:r>
-              <a:rPr b="1" lang="en-US" sz="3000" strike="noStrike" u="none">
-                <a:solidFill>
-                  <a:srgbClr val="1e2d40"/>
-                </a:solidFill>
-                <a:effectLst/>
-                <a:uFillTx/>
-                <a:latin typeface="Cambria"/>
-                <a:ea typeface="Cambria"/>
-              </a:rPr>
-              <a:t>Ce qu'on retient</a:t>
-            </a:r>
-            <a:endParaRPr b="0" lang="en-US" sz="3000" strike="noStrike" u="none">
-              <a:solidFill>
-                <a:srgbClr val="000000"/>
-              </a:solidFill>
-              <a:effectLst/>
-              <a:uFillTx/>
-              <a:latin typeface="Arial"/>
-            </a:endParaRPr>
-          </a:p>
-        </p:txBody>
-      </p:sp>
-      <p:sp>
-        <p:nvSpPr>
-          <p:cNvPr id="112" name="Shape 2"/>
-          <p:cNvSpPr/>
-          <p:nvPr/>
-        </p:nvSpPr>
-        <p:spPr>
-          <a:xfrm>
-            <a:off x="502920" y="1261800"/>
-            <a:ext cx="8138160" cy="360"/>
-          </a:xfrm>
-          <a:prstGeom prst="line">
-            <a:avLst/>
-          </a:prstGeom>
-          <a:ln w="9525">
-            <a:solidFill>
-              <a:srgbClr val="d5d8dc"/>
-            </a:solidFill>
-            <a:round/>
-          </a:ln>
-        </p:spPr>
-        <p:style>
-          <a:lnRef idx="0"/>
-          <a:fillRef idx="0"/>
-          <a:effectRef idx="0"/>
-          <a:fontRef idx="minor"/>
-        </p:style>
-        <p:txBody>
-          <a:bodyPr lIns="90000" rIns="90000" tIns="-44640" bIns="-44640" anchor="t" anchorCtr="1">
-            <a:noAutofit/>
-          </a:bodyPr>
-          <a:p>
-            <a:endParaRPr b="0" lang="en-US" sz="1800" strike="noStrike" u="none">
-              <a:solidFill>
-                <a:srgbClr val="000000"/>
-              </a:solidFill>
-              <a:effectLst/>
-              <a:uFillTx/>
-              <a:latin typeface="Arial"/>
-            </a:endParaRPr>
-          </a:p>
-        </p:txBody>
-      </p:sp>
-      <p:sp>
-        <p:nvSpPr>
-          <p:cNvPr id="113" name="Shape 3"/>
-          <p:cNvSpPr/>
-          <p:nvPr/>
-        </p:nvSpPr>
-        <p:spPr>
-          <a:xfrm>
-            <a:off x="365760" y="1417320"/>
-            <a:ext cx="4205880" cy="1645560"/>
-          </a:xfrm>
-          <a:prstGeom prst="roundRect">
-            <a:avLst>
-              <a:gd name="adj" fmla="val 6667"/>
-            </a:avLst>
-          </a:prstGeom>
-          <a:solidFill>
-            <a:srgbClr val="ffffff"/>
-          </a:solidFill>
-          <a:ln w="6350">
-            <a:solidFill>
-              <a:srgbClr val="d5d8dc"/>
-            </a:solidFill>
-            <a:round/>
-          </a:ln>
-          <a:effectLst>
-            <a:outerShdw algn="bl" blurRad="101520" dir="2700000" dist="25455" kx="0" ky="0" rotWithShape="0" sx="100000" sy="100000">
-              <a:srgbClr val="000000">
-                <a:alpha val="8000"/>
-              </a:srgbClr>
-            </a:outerShdw>
-          </a:effectLst>
-        </p:spPr>
-        <p:style>
-          <a:lnRef idx="0"/>
-          <a:fillRef idx="0"/>
-          <a:effectRef idx="0"/>
-          <a:fontRef idx="minor"/>
-        </p:style>
-        <p:txBody>
-          <a:bodyPr lIns="90000" rIns="90000" tIns="45000" bIns="45000" anchor="t">
-            <a:noAutofit/>
-          </a:bodyPr>
-          <a:p>
-            <a:endParaRPr b="0" lang="en-US" sz="1800" strike="noStrike" u="none">
-              <a:solidFill>
-                <a:srgbClr val="000000"/>
-              </a:solidFill>
-              <a:effectLst/>
-              <a:uFillTx/>
-              <a:latin typeface="Arial"/>
-            </a:endParaRPr>
-          </a:p>
-        </p:txBody>
-      </p:sp>
-      <p:sp>
-        <p:nvSpPr>
-          <p:cNvPr id="114" name="Text 4"/>
-          <p:cNvSpPr/>
-          <p:nvPr/>
-        </p:nvSpPr>
-        <p:spPr>
-          <a:xfrm>
-            <a:off x="548640" y="1581840"/>
-            <a:ext cx="594000" cy="594000"/>
-          </a:xfrm>
-          <a:prstGeom prst="rect">
-            <a:avLst/>
-          </a:prstGeom>
-          <a:noFill/>
-          <a:ln w="0">
-            <a:noFill/>
-          </a:ln>
-        </p:spPr>
-        <p:style>
-          <a:lnRef idx="0"/>
-          <a:fillRef idx="0"/>
-          <a:effectRef idx="0"/>
-          <a:fontRef idx="minor"/>
-        </p:style>
-        <p:txBody>
-          <a:bodyPr lIns="0" rIns="0" tIns="0" bIns="0" anchor="ctr">
-            <a:noAutofit/>
-          </a:bodyPr>
-          <a:p>
-            <a:pPr algn="ctr" defTabSz="914400">
-              <a:lnSpc>
-                <a:spcPct val="100000"/>
-              </a:lnSpc>
-              <a:tabLst>
-                <a:tab algn="l" pos="0"/>
-              </a:tabLst>
-            </a:pPr>
-            <a:r>
-              <a:rPr b="0" lang="en-US" sz="2600" strike="noStrike" u="none">
-                <a:solidFill>
-                  <a:srgbClr val="000000"/>
-                </a:solidFill>
-                <a:effectLst/>
-                <a:uFillTx/>
-                <a:latin typeface="Calibri"/>
-              </a:rPr>
-              <a:t>🏗️</a:t>
-            </a:r>
-            <a:endParaRPr b="0" lang="en-US" sz="2600" strike="noStrike" u="none">
-              <a:solidFill>
-                <a:srgbClr val="000000"/>
-              </a:solidFill>
-              <a:effectLst/>
-              <a:uFillTx/>
-              <a:latin typeface="Arial"/>
-            </a:endParaRPr>
-          </a:p>
-        </p:txBody>
-      </p:sp>
-      <p:sp>
-        <p:nvSpPr>
-          <p:cNvPr id="115" name="Text 5"/>
-          <p:cNvSpPr/>
-          <p:nvPr/>
-        </p:nvSpPr>
-        <p:spPr>
-          <a:xfrm>
-            <a:off x="1188720" y="1581840"/>
-            <a:ext cx="3200040" cy="347040"/>
-          </a:xfrm>
-          <a:prstGeom prst="rect">
-            <a:avLst/>
-          </a:prstGeom>
-          <a:noFill/>
-          <a:ln w="0">
-            <a:noFill/>
-          </a:ln>
-        </p:spPr>
-        <p:style>
-          <a:lnRef idx="0"/>
-          <a:fillRef idx="0"/>
-          <a:effectRef idx="0"/>
-          <a:fontRef idx="minor"/>
-        </p:style>
-        <p:txBody>
-          <a:bodyPr lIns="0" rIns="0" tIns="0" bIns="0" anchor="ctr">
-            <a:noAutofit/>
-          </a:bodyPr>
-          <a:p>
-            <a:pPr defTabSz="914400">
-              <a:lnSpc>
-                <a:spcPct val="100000"/>
-              </a:lnSpc>
-              <a:tabLst>
-                <a:tab algn="l" pos="0"/>
-              </a:tabLst>
-            </a:pPr>
-            <a:r>
-              <a:rPr b="1" lang="en-US" sz="1200" strike="noStrike" u="none">
-                <a:solidFill>
-                  <a:srgbClr val="2c3e50"/>
-                </a:solidFill>
-                <a:effectLst/>
-                <a:uFillTx/>
-                <a:latin typeface="Calibri"/>
-                <a:ea typeface="Calibri"/>
-              </a:rPr>
-              <a:t>Architecture MVC en pratique</a:t>
-            </a:r>
-            <a:endParaRPr b="0" lang="en-US" sz="1200" strike="noStrike" u="none">
-              <a:solidFill>
-                <a:srgbClr val="000000"/>
-              </a:solidFill>
-              <a:effectLst/>
-              <a:uFillTx/>
-              <a:latin typeface="Arial"/>
-            </a:endParaRPr>
-          </a:p>
-        </p:txBody>
-      </p:sp>
-      <p:sp>
-        <p:nvSpPr>
-          <p:cNvPr id="116" name="Text 6"/>
-          <p:cNvSpPr/>
-          <p:nvPr/>
-        </p:nvSpPr>
-        <p:spPr>
-          <a:xfrm>
-            <a:off x="1188720" y="1965960"/>
-            <a:ext cx="3200040" cy="868320"/>
-          </a:xfrm>
-          <a:prstGeom prst="rect">
-            <a:avLst/>
-          </a:prstGeom>
-          <a:noFill/>
-          <a:ln w="0">
-            <a:noFill/>
-          </a:ln>
-        </p:spPr>
-        <p:style>
-          <a:lnRef idx="0"/>
-          <a:fillRef idx="0"/>
-          <a:effectRef idx="0"/>
-          <a:fontRef idx="minor"/>
-        </p:style>
-        <p:txBody>
-          <a:bodyPr lIns="0" rIns="0" tIns="0" bIns="0" anchor="ctr">
-            <a:noAutofit/>
-          </a:bodyPr>
-          <a:p>
-            <a:pPr defTabSz="914400">
-              <a:lnSpc>
-                <a:spcPct val="100000"/>
-              </a:lnSpc>
-              <a:tabLst>
-                <a:tab algn="l" pos="0"/>
-              </a:tabLst>
-            </a:pPr>
-            <a:r>
-              <a:rPr b="0" lang="en-US" sz="1100" strike="noStrike" u="none">
-                <a:solidFill>
-                  <a:srgbClr val="5d6d7e"/>
-                </a:solidFill>
-                <a:effectLst/>
-                <a:uFillTx/>
-                <a:latin typeface="Calibri"/>
-                <a:ea typeface="Calibri"/>
-              </a:rPr>
-              <a:t>Django nous a forcés à structurer proprement notre code dès le départ.</a:t>
-            </a:r>
-            <a:endParaRPr b="0" lang="en-US" sz="1100" strike="noStrike" u="none">
-              <a:solidFill>
-                <a:srgbClr val="000000"/>
-              </a:solidFill>
-              <a:effectLst/>
-              <a:uFillTx/>
-              <a:latin typeface="Arial"/>
-            </a:endParaRPr>
-          </a:p>
-        </p:txBody>
-      </p:sp>
-      <p:sp>
-        <p:nvSpPr>
-          <p:cNvPr id="117" name="Shape 7"/>
-          <p:cNvSpPr/>
-          <p:nvPr/>
-        </p:nvSpPr>
-        <p:spPr>
-          <a:xfrm>
-            <a:off x="4800600" y="1417320"/>
-            <a:ext cx="4205880" cy="1645560"/>
-          </a:xfrm>
-          <a:prstGeom prst="roundRect">
-            <a:avLst>
-              <a:gd name="adj" fmla="val 6667"/>
-            </a:avLst>
-          </a:prstGeom>
-          <a:solidFill>
-            <a:srgbClr val="ffffff"/>
-          </a:solidFill>
-          <a:ln w="6350">
-            <a:solidFill>
-              <a:srgbClr val="d5d8dc"/>
-            </a:solidFill>
-            <a:round/>
-          </a:ln>
-          <a:effectLst>
-            <a:outerShdw algn="bl" blurRad="101520" dir="2700000" dist="25455" kx="0" ky="0" rotWithShape="0" sx="100000" sy="100000">
-              <a:srgbClr val="000000">
-                <a:alpha val="8000"/>
-              </a:srgbClr>
-            </a:outerShdw>
-          </a:effectLst>
-        </p:spPr>
-        <p:style>
-          <a:lnRef idx="0"/>
-          <a:fillRef idx="0"/>
-          <a:effectRef idx="0"/>
-          <a:fontRef idx="minor"/>
-        </p:style>
-        <p:txBody>
-          <a:bodyPr lIns="90000" rIns="90000" tIns="45000" bIns="45000" anchor="t">
-            <a:noAutofit/>
-          </a:bodyPr>
-          <a:p>
-            <a:endParaRPr b="0" lang="en-US" sz="1800" strike="noStrike" u="none">
-              <a:solidFill>
-                <a:srgbClr val="000000"/>
-              </a:solidFill>
-              <a:effectLst/>
-              <a:uFillTx/>
-              <a:latin typeface="Arial"/>
-            </a:endParaRPr>
-          </a:p>
-        </p:txBody>
-      </p:sp>
-      <p:sp>
-        <p:nvSpPr>
-          <p:cNvPr id="118" name="Text 8"/>
-          <p:cNvSpPr/>
-          <p:nvPr/>
-        </p:nvSpPr>
-        <p:spPr>
-          <a:xfrm>
-            <a:off x="4983480" y="1581840"/>
-            <a:ext cx="594000" cy="594000"/>
-          </a:xfrm>
-          <a:prstGeom prst="rect">
-            <a:avLst/>
-          </a:prstGeom>
-          <a:noFill/>
-          <a:ln w="0">
-            <a:noFill/>
-          </a:ln>
-        </p:spPr>
-        <p:style>
-          <a:lnRef idx="0"/>
-          <a:fillRef idx="0"/>
-          <a:effectRef idx="0"/>
-          <a:fontRef idx="minor"/>
-        </p:style>
-        <p:txBody>
-          <a:bodyPr lIns="0" rIns="0" tIns="0" bIns="0" anchor="ctr">
-            <a:noAutofit/>
-          </a:bodyPr>
-          <a:p>
-            <a:pPr algn="ctr" defTabSz="914400">
-              <a:lnSpc>
-                <a:spcPct val="100000"/>
-              </a:lnSpc>
-              <a:tabLst>
-                <a:tab algn="l" pos="0"/>
-              </a:tabLst>
-            </a:pPr>
-            <a:r>
-              <a:rPr b="0" lang="en-US" sz="2600" strike="noStrike" u="none">
-                <a:solidFill>
-                  <a:srgbClr val="000000"/>
-                </a:solidFill>
-                <a:effectLst/>
-                <a:uFillTx/>
-                <a:latin typeface="Calibri"/>
-              </a:rPr>
-              <a:t>🤝</a:t>
-            </a:r>
-            <a:endParaRPr b="0" lang="en-US" sz="2600" strike="noStrike" u="none">
-              <a:solidFill>
-                <a:srgbClr val="000000"/>
-              </a:solidFill>
-              <a:effectLst/>
-              <a:uFillTx/>
-              <a:latin typeface="Arial"/>
-            </a:endParaRPr>
-          </a:p>
-        </p:txBody>
-      </p:sp>
-      <p:sp>
-        <p:nvSpPr>
-          <p:cNvPr id="119" name="Text 9"/>
-          <p:cNvSpPr/>
-          <p:nvPr/>
-        </p:nvSpPr>
-        <p:spPr>
-          <a:xfrm>
-            <a:off x="5623560" y="1581840"/>
-            <a:ext cx="3200040" cy="347040"/>
-          </a:xfrm>
-          <a:prstGeom prst="rect">
-            <a:avLst/>
-          </a:prstGeom>
-          <a:noFill/>
-          <a:ln w="0">
-            <a:noFill/>
-          </a:ln>
-        </p:spPr>
-        <p:style>
-          <a:lnRef idx="0"/>
-          <a:fillRef idx="0"/>
-          <a:effectRef idx="0"/>
-          <a:fontRef idx="minor"/>
-        </p:style>
-        <p:txBody>
-          <a:bodyPr lIns="0" rIns="0" tIns="0" bIns="0" anchor="ctr">
-            <a:noAutofit/>
-          </a:bodyPr>
-          <a:p>
-            <a:pPr defTabSz="914400">
-              <a:lnSpc>
-                <a:spcPct val="100000"/>
-              </a:lnSpc>
-              <a:tabLst>
-                <a:tab algn="l" pos="0"/>
-              </a:tabLst>
-            </a:pPr>
-            <a:r>
-              <a:rPr b="1" lang="en-US" sz="1200" strike="noStrike" u="none">
-                <a:solidFill>
-                  <a:srgbClr val="2c3e50"/>
-                </a:solidFill>
-                <a:effectLst/>
-                <a:uFillTx/>
-                <a:latin typeface="Calibri"/>
-                <a:ea typeface="Calibri"/>
-              </a:rPr>
-              <a:t>Travail en équipe réel</a:t>
-            </a:r>
-            <a:endParaRPr b="0" lang="en-US" sz="1200" strike="noStrike" u="none">
-              <a:solidFill>
-                <a:srgbClr val="000000"/>
-              </a:solidFill>
-              <a:effectLst/>
-              <a:uFillTx/>
-              <a:latin typeface="Arial"/>
-            </a:endParaRPr>
-          </a:p>
-        </p:txBody>
-      </p:sp>
-      <p:sp>
-        <p:nvSpPr>
-          <p:cNvPr id="120" name="Text 10"/>
-          <p:cNvSpPr/>
-          <p:nvPr/>
-        </p:nvSpPr>
-        <p:spPr>
-          <a:xfrm>
-            <a:off x="5623560" y="1965960"/>
-            <a:ext cx="3200040" cy="868320"/>
-          </a:xfrm>
-          <a:prstGeom prst="rect">
-            <a:avLst/>
-          </a:prstGeom>
-          <a:noFill/>
-          <a:ln w="0">
-            <a:noFill/>
-          </a:ln>
-        </p:spPr>
-        <p:style>
-          <a:lnRef idx="0"/>
-          <a:fillRef idx="0"/>
-          <a:effectRef idx="0"/>
-          <a:fontRef idx="minor"/>
-        </p:style>
-        <p:txBody>
-          <a:bodyPr lIns="0" rIns="0" tIns="0" bIns="0" anchor="ctr">
-            <a:noAutofit/>
-          </a:bodyPr>
-          <a:p>
-            <a:pPr defTabSz="914400">
-              <a:lnSpc>
-                <a:spcPct val="100000"/>
-              </a:lnSpc>
-              <a:tabLst>
-                <a:tab algn="l" pos="0"/>
-              </a:tabLst>
-            </a:pPr>
-            <a:r>
-              <a:rPr b="0" lang="en-US" sz="1100" strike="noStrike" u="none">
-                <a:solidFill>
-                  <a:srgbClr val="5d6d7e"/>
-                </a:solidFill>
-                <a:effectLst/>
-                <a:uFillTx/>
-                <a:latin typeface="Calibri"/>
-                <a:ea typeface="Calibri"/>
-              </a:rPr>
-              <a:t>Git et GitHub ont rendu la collaboration fluide, avec branches et pull requests.</a:t>
-            </a:r>
-            <a:endParaRPr b="0" lang="en-US" sz="1100" strike="noStrike" u="none">
-              <a:solidFill>
-                <a:srgbClr val="000000"/>
-              </a:solidFill>
-              <a:effectLst/>
-              <a:uFillTx/>
-              <a:latin typeface="Arial"/>
-            </a:endParaRPr>
-          </a:p>
-        </p:txBody>
-      </p:sp>
-      <p:sp>
-        <p:nvSpPr>
-          <p:cNvPr id="121" name="Shape 11"/>
-          <p:cNvSpPr/>
-          <p:nvPr/>
-        </p:nvSpPr>
-        <p:spPr>
-          <a:xfrm>
-            <a:off x="365760" y="3200400"/>
-            <a:ext cx="4205880" cy="1645560"/>
-          </a:xfrm>
-          <a:prstGeom prst="roundRect">
-            <a:avLst>
-              <a:gd name="adj" fmla="val 6667"/>
-            </a:avLst>
-          </a:prstGeom>
-          <a:solidFill>
-            <a:srgbClr val="ffffff"/>
-          </a:solidFill>
-          <a:ln w="6350">
-            <a:solidFill>
-              <a:srgbClr val="d5d8dc"/>
-            </a:solidFill>
-            <a:round/>
-          </a:ln>
-          <a:effectLst>
-            <a:outerShdw algn="bl" blurRad="101520" dir="2700000" dist="25455" kx="0" ky="0" rotWithShape="0" sx="100000" sy="100000">
-              <a:srgbClr val="000000">
-                <a:alpha val="8000"/>
-              </a:srgbClr>
-            </a:outerShdw>
-          </a:effectLst>
-        </p:spPr>
-        <p:style>
-          <a:lnRef idx="0"/>
-          <a:fillRef idx="0"/>
-          <a:effectRef idx="0"/>
-          <a:fontRef idx="minor"/>
-        </p:style>
-        <p:txBody>
-          <a:bodyPr lIns="90000" rIns="90000" tIns="45000" bIns="45000" anchor="t">
-            <a:noAutofit/>
-          </a:bodyPr>
-          <a:p>
-            <a:endParaRPr b="0" lang="en-US" sz="1800" strike="noStrike" u="none">
-              <a:solidFill>
-                <a:srgbClr val="000000"/>
-              </a:solidFill>
-              <a:effectLst/>
-              <a:uFillTx/>
-              <a:latin typeface="Arial"/>
-            </a:endParaRPr>
-          </a:p>
-        </p:txBody>
-      </p:sp>
-      <p:sp>
-        <p:nvSpPr>
-          <p:cNvPr id="122" name="Text 12"/>
-          <p:cNvSpPr/>
-          <p:nvPr/>
-        </p:nvSpPr>
-        <p:spPr>
-          <a:xfrm>
-            <a:off x="548640" y="3364920"/>
-            <a:ext cx="594000" cy="594000"/>
-          </a:xfrm>
-          <a:prstGeom prst="rect">
-            <a:avLst/>
-          </a:prstGeom>
-          <a:noFill/>
-          <a:ln w="0">
-            <a:noFill/>
-          </a:ln>
-        </p:spPr>
-        <p:style>
-          <a:lnRef idx="0"/>
-          <a:fillRef idx="0"/>
-          <a:effectRef idx="0"/>
-          <a:fontRef idx="minor"/>
-        </p:style>
-        <p:txBody>
-          <a:bodyPr lIns="0" rIns="0" tIns="0" bIns="0" anchor="ctr">
-            <a:noAutofit/>
-          </a:bodyPr>
-          <a:p>
-            <a:pPr algn="ctr" defTabSz="914400">
-              <a:lnSpc>
-                <a:spcPct val="100000"/>
-              </a:lnSpc>
-              <a:tabLst>
-                <a:tab algn="l" pos="0"/>
-              </a:tabLst>
-            </a:pPr>
-            <a:r>
-              <a:rPr b="0" lang="en-US" sz="2600" strike="noStrike" u="none">
-                <a:solidFill>
-                  <a:srgbClr val="000000"/>
-                </a:solidFill>
-                <a:effectLst/>
-                <a:uFillTx/>
-                <a:latin typeface="Calibri"/>
-              </a:rPr>
-              <a:t>🧩</a:t>
-            </a:r>
-            <a:endParaRPr b="0" lang="en-US" sz="2600" strike="noStrike" u="none">
-              <a:solidFill>
-                <a:srgbClr val="000000"/>
-              </a:solidFill>
-              <a:effectLst/>
-              <a:uFillTx/>
-              <a:latin typeface="Arial"/>
-            </a:endParaRPr>
-          </a:p>
-        </p:txBody>
-      </p:sp>
-      <p:sp>
-        <p:nvSpPr>
-          <p:cNvPr id="123" name="Text 13"/>
-          <p:cNvSpPr/>
-          <p:nvPr/>
-        </p:nvSpPr>
-        <p:spPr>
-          <a:xfrm>
-            <a:off x="1188720" y="3364920"/>
-            <a:ext cx="3200040" cy="347040"/>
-          </a:xfrm>
-          <a:prstGeom prst="rect">
-            <a:avLst/>
-          </a:prstGeom>
-          <a:noFill/>
-          <a:ln w="0">
-            <a:noFill/>
-          </a:ln>
-        </p:spPr>
-        <p:style>
-          <a:lnRef idx="0"/>
-          <a:fillRef idx="0"/>
-          <a:effectRef idx="0"/>
-          <a:fontRef idx="minor"/>
-        </p:style>
-        <p:txBody>
-          <a:bodyPr lIns="0" rIns="0" tIns="0" bIns="0" anchor="ctr">
-            <a:noAutofit/>
-          </a:bodyPr>
-          <a:p>
-            <a:pPr defTabSz="914400">
-              <a:lnSpc>
-                <a:spcPct val="100000"/>
-              </a:lnSpc>
-              <a:tabLst>
-                <a:tab algn="l" pos="0"/>
-              </a:tabLst>
-            </a:pPr>
-            <a:r>
-              <a:rPr b="1" lang="en-US" sz="1200" strike="noStrike" u="none">
-                <a:solidFill>
-                  <a:srgbClr val="2c3e50"/>
-                </a:solidFill>
-                <a:effectLst/>
-                <a:uFillTx/>
-                <a:latin typeface="Calibri"/>
-                <a:ea typeface="Calibri"/>
-              </a:rPr>
-              <a:t>Résolution de problèmes</a:t>
-            </a:r>
-            <a:endParaRPr b="0" lang="en-US" sz="1200" strike="noStrike" u="none">
-              <a:solidFill>
-                <a:srgbClr val="000000"/>
-              </a:solidFill>
-              <a:effectLst/>
-              <a:uFillTx/>
-              <a:latin typeface="Arial"/>
-            </a:endParaRPr>
-          </a:p>
-        </p:txBody>
-      </p:sp>
-      <p:sp>
-        <p:nvSpPr>
-          <p:cNvPr id="124" name="Text 14"/>
-          <p:cNvSpPr/>
-          <p:nvPr/>
-        </p:nvSpPr>
-        <p:spPr>
-          <a:xfrm>
-            <a:off x="1188720" y="3749040"/>
-            <a:ext cx="3200040" cy="868320"/>
-          </a:xfrm>
-          <a:prstGeom prst="rect">
-            <a:avLst/>
-          </a:prstGeom>
-          <a:noFill/>
-          <a:ln w="0">
-            <a:noFill/>
-          </a:ln>
-        </p:spPr>
-        <p:style>
-          <a:lnRef idx="0"/>
-          <a:fillRef idx="0"/>
-          <a:effectRef idx="0"/>
-          <a:fontRef idx="minor"/>
-        </p:style>
-        <p:txBody>
-          <a:bodyPr lIns="0" rIns="0" tIns="0" bIns="0" anchor="ctr">
-            <a:noAutofit/>
-          </a:bodyPr>
-          <a:p>
-            <a:pPr defTabSz="914400">
-              <a:lnSpc>
-                <a:spcPct val="100000"/>
-              </a:lnSpc>
-              <a:tabLst>
-                <a:tab algn="l" pos="0"/>
-              </a:tabLst>
-            </a:pPr>
-            <a:r>
-              <a:rPr b="0" lang="en-US" sz="1100" strike="noStrike" u="none">
-                <a:solidFill>
-                  <a:srgbClr val="5d6d7e"/>
-                </a:solidFill>
-                <a:effectLst/>
-                <a:uFillTx/>
-                <a:latin typeface="Calibri"/>
-                <a:ea typeface="Calibri"/>
-              </a:rPr>
-              <a:t>Les dépendances circulaires, la sécurité des sessions… autant de vraies difficultés surmontées.</a:t>
-            </a:r>
-            <a:endParaRPr b="0" lang="en-US" sz="1100" strike="noStrike" u="none">
-              <a:solidFill>
-                <a:srgbClr val="000000"/>
-              </a:solidFill>
-              <a:effectLst/>
-              <a:uFillTx/>
-              <a:latin typeface="Arial"/>
-            </a:endParaRPr>
-          </a:p>
-        </p:txBody>
-      </p:sp>
-      <p:sp>
-        <p:nvSpPr>
-          <p:cNvPr id="125" name="Shape 15"/>
-          <p:cNvSpPr/>
-          <p:nvPr/>
-        </p:nvSpPr>
-        <p:spPr>
-          <a:xfrm>
-            <a:off x="4800600" y="3200400"/>
-            <a:ext cx="4205880" cy="1645560"/>
-          </a:xfrm>
-          <a:prstGeom prst="roundRect">
-            <a:avLst>
-              <a:gd name="adj" fmla="val 6667"/>
-            </a:avLst>
-          </a:prstGeom>
-          <a:solidFill>
-            <a:srgbClr val="ffffff"/>
-          </a:solidFill>
-          <a:ln w="6350">
-            <a:solidFill>
-              <a:srgbClr val="d5d8dc"/>
-            </a:solidFill>
-            <a:round/>
-          </a:ln>
-          <a:effectLst>
-            <a:outerShdw algn="bl" blurRad="101520" dir="2700000" dist="25455" kx="0" ky="0" rotWithShape="0" sx="100000" sy="100000">
-              <a:srgbClr val="000000">
-                <a:alpha val="8000"/>
-              </a:srgbClr>
-            </a:outerShdw>
-          </a:effectLst>
-        </p:spPr>
-        <p:style>
-          <a:lnRef idx="0"/>
-          <a:fillRef idx="0"/>
-          <a:effectRef idx="0"/>
-          <a:fontRef idx="minor"/>
-        </p:style>
-        <p:txBody>
-          <a:bodyPr lIns="90000" rIns="90000" tIns="45000" bIns="45000" anchor="t">
-            <a:noAutofit/>
-          </a:bodyPr>
-          <a:p>
-            <a:endParaRPr b="0" lang="en-US" sz="1800" strike="noStrike" u="none">
-              <a:solidFill>
-                <a:srgbClr val="000000"/>
-              </a:solidFill>
-              <a:effectLst/>
-              <a:uFillTx/>
-              <a:latin typeface="Arial"/>
-            </a:endParaRPr>
-          </a:p>
-        </p:txBody>
-      </p:sp>
-      <p:sp>
-        <p:nvSpPr>
-          <p:cNvPr id="126" name="Text 16"/>
-          <p:cNvSpPr/>
-          <p:nvPr/>
-        </p:nvSpPr>
-        <p:spPr>
-          <a:xfrm>
-            <a:off x="4983480" y="3364920"/>
-            <a:ext cx="594000" cy="594000"/>
-          </a:xfrm>
-          <a:prstGeom prst="rect">
-            <a:avLst/>
-          </a:prstGeom>
-          <a:noFill/>
-          <a:ln w="0">
-            <a:noFill/>
-          </a:ln>
-        </p:spPr>
-        <p:style>
-          <a:lnRef idx="0"/>
-          <a:fillRef idx="0"/>
-          <a:effectRef idx="0"/>
-          <a:fontRef idx="minor"/>
-        </p:style>
-        <p:txBody>
-          <a:bodyPr lIns="0" rIns="0" tIns="0" bIns="0" anchor="ctr">
-            <a:noAutofit/>
-          </a:bodyPr>
-          <a:p>
-            <a:pPr algn="ctr" defTabSz="914400">
-              <a:lnSpc>
-                <a:spcPct val="100000"/>
-              </a:lnSpc>
-              <a:tabLst>
-                <a:tab algn="l" pos="0"/>
-              </a:tabLst>
-            </a:pPr>
-            <a:r>
-              <a:rPr b="0" lang="en-US" sz="2600" strike="noStrike" u="none">
-                <a:solidFill>
-                  <a:srgbClr val="000000"/>
-                </a:solidFill>
-                <a:effectLst/>
-                <a:uFillTx/>
-                <a:latin typeface="Calibri"/>
-              </a:rPr>
-              <a:t>📈</a:t>
-            </a:r>
-            <a:endParaRPr b="0" lang="en-US" sz="2600" strike="noStrike" u="none">
-              <a:solidFill>
-                <a:srgbClr val="000000"/>
-              </a:solidFill>
-              <a:effectLst/>
-              <a:uFillTx/>
-              <a:latin typeface="Arial"/>
-            </a:endParaRPr>
-          </a:p>
-        </p:txBody>
-      </p:sp>
-      <p:sp>
-        <p:nvSpPr>
-          <p:cNvPr id="127" name="Text 17"/>
-          <p:cNvSpPr/>
-          <p:nvPr/>
-        </p:nvSpPr>
-        <p:spPr>
-          <a:xfrm>
-            <a:off x="5623560" y="3364920"/>
-            <a:ext cx="3200040" cy="347040"/>
-          </a:xfrm>
-          <a:prstGeom prst="rect">
-            <a:avLst/>
-          </a:prstGeom>
-          <a:noFill/>
-          <a:ln w="0">
-            <a:noFill/>
-          </a:ln>
-        </p:spPr>
-        <p:style>
-          <a:lnRef idx="0"/>
-          <a:fillRef idx="0"/>
-          <a:effectRef idx="0"/>
-          <a:fontRef idx="minor"/>
-        </p:style>
-        <p:txBody>
-          <a:bodyPr lIns="0" rIns="0" tIns="0" bIns="0" anchor="ctr">
-            <a:noAutofit/>
-          </a:bodyPr>
-          <a:p>
-            <a:pPr defTabSz="914400">
-              <a:lnSpc>
-                <a:spcPct val="100000"/>
-              </a:lnSpc>
-              <a:tabLst>
-                <a:tab algn="l" pos="0"/>
-              </a:tabLst>
-            </a:pPr>
-            <a:r>
-              <a:rPr b="1" lang="en-US" sz="1200" strike="noStrike" u="none">
-                <a:solidFill>
-                  <a:srgbClr val="2c3e50"/>
-                </a:solidFill>
-                <a:effectLst/>
-                <a:uFillTx/>
-                <a:latin typeface="Calibri"/>
-                <a:ea typeface="Calibri"/>
-              </a:rPr>
-              <a:t>Projet évolutif</a:t>
-            </a:r>
-            <a:endParaRPr b="0" lang="en-US" sz="1200" strike="noStrike" u="none">
-              <a:solidFill>
-                <a:srgbClr val="000000"/>
-              </a:solidFill>
-              <a:effectLst/>
-              <a:uFillTx/>
-              <a:latin typeface="Arial"/>
-            </a:endParaRPr>
-          </a:p>
-        </p:txBody>
-      </p:sp>
-      <p:sp>
-        <p:nvSpPr>
-          <p:cNvPr id="128" name="Text 18"/>
-          <p:cNvSpPr/>
-          <p:nvPr/>
-        </p:nvSpPr>
-        <p:spPr>
-          <a:xfrm>
-            <a:off x="5623560" y="3749040"/>
-            <a:ext cx="3200040" cy="868320"/>
-          </a:xfrm>
-          <a:prstGeom prst="rect">
-            <a:avLst/>
-          </a:prstGeom>
-          <a:noFill/>
-          <a:ln w="0">
-            <a:noFill/>
-          </a:ln>
-        </p:spPr>
-        <p:style>
-          <a:lnRef idx="0"/>
-          <a:fillRef idx="0"/>
-          <a:effectRef idx="0"/>
-          <a:fontRef idx="minor"/>
-        </p:style>
-        <p:txBody>
-          <a:bodyPr lIns="0" rIns="0" tIns="0" bIns="0" anchor="ctr">
-            <a:noAutofit/>
-          </a:bodyPr>
-          <a:p>
-            <a:pPr defTabSz="914400">
-              <a:lnSpc>
-                <a:spcPct val="100000"/>
-              </a:lnSpc>
-              <a:tabLst>
-                <a:tab algn="l" pos="0"/>
-              </a:tabLst>
-            </a:pPr>
-            <a:r>
-              <a:rPr b="0" lang="en-US" sz="1100" strike="noStrike" u="none">
-                <a:solidFill>
-                  <a:srgbClr val="5d6d7e"/>
-                </a:solidFill>
-                <a:effectLst/>
-                <a:uFillTx/>
-                <a:latin typeface="Calibri"/>
-                <a:ea typeface="Calibri"/>
-              </a:rPr>
-              <a:t>L'app core et la modularité Django permettent d'ajouter REST ou React facilement demain.</a:t>
-            </a:r>
-            <a:endParaRPr b="0" lang="en-US" sz="1100" strike="noStrike" u="none">
-              <a:solidFill>
-                <a:srgbClr val="000000"/>
-              </a:solidFill>
-              <a:effectLst/>
-              <a:uFillTx/>
-              <a:latin typeface="Arial"/>
-            </a:endParaRPr>
-          </a:p>
-        </p:txBody>
-      </p:sp>
-    </p:spTree>
-  </p:cSld>
-  <mc:AlternateContent>
-    <mc:Choice Requires="p14">
-      <p:transition spd="slow" p14:dur="2000"/>
-    </mc:Choice>
-    <mc:Fallback>
-      <p:transition spd="slow"/>
-    </mc:Fallback>
-  </mc:AlternateContent>
-</p:sld>
-</file>
-
-<file path=ppt/slides/slide11.xml><?xml version="1.0" encoding="utf-8"?>
 <p:sld xmlns:a="http://schemas.openxmlformats.org/drawingml/2006/main" xmlns:p="http://schemas.openxmlformats.org/presentationml/2006/main" xmlns:r="http://schemas.openxmlformats.org/officeDocument/2006/relationships" xmlns:p14="http://schemas.microsoft.com/office/powerpoint/2010/main" xmlns:p15="http://schemas.microsoft.com/office/powerpoint/2012/main" xmlns:mc="http://schemas.openxmlformats.org/markup-compatibility/2006">
   <p:cSld>
     <p:bg>
@@ -3832,14 +2589,14 @@
       </p:grpSpPr>
       <p:sp>
         <p:nvSpPr>
-          <p:cNvPr id="129" name="Shape 0"/>
+          <p:cNvPr id="105" name="Shape 0"/>
           <p:cNvSpPr/>
           <p:nvPr/>
         </p:nvSpPr>
         <p:spPr>
           <a:xfrm>
             <a:off x="0" y="0"/>
-            <a:ext cx="9143640" cy="54360"/>
+            <a:ext cx="9142920" cy="53640"/>
           </a:xfrm>
           <a:prstGeom prst="rect">
             <a:avLst/>
@@ -3865,6 +2622,11 @@
             <a:noAutofit/>
           </a:bodyPr>
           <a:p>
+            <a:pPr>
+              <a:lnSpc>
+                <a:spcPct val="100000"/>
+              </a:lnSpc>
+            </a:pPr>
             <a:endParaRPr b="0" lang="en-US" sz="1800" strike="noStrike" u="none">
               <a:solidFill>
                 <a:srgbClr val="000000"/>
@@ -3878,14 +2640,14 @@
       </p:sp>
       <p:sp>
         <p:nvSpPr>
-          <p:cNvPr id="130" name="Text 1"/>
+          <p:cNvPr id="106" name="Text 1"/>
           <p:cNvSpPr/>
           <p:nvPr/>
         </p:nvSpPr>
         <p:spPr>
           <a:xfrm>
             <a:off x="640080" y="1188720"/>
-            <a:ext cx="7863480" cy="822600"/>
+            <a:ext cx="7862760" cy="821880"/>
           </a:xfrm>
           <a:prstGeom prst="rect">
             <a:avLst/>
@@ -3939,7 +2701,7 @@
       </p:sp>
       <p:sp>
         <p:nvSpPr>
-          <p:cNvPr id="131" name="Shape 2"/>
+          <p:cNvPr id="107" name="Shape 2"/>
           <p:cNvSpPr/>
           <p:nvPr/>
         </p:nvSpPr>
@@ -3982,14 +2744,14 @@
       </p:sp>
       <p:sp>
         <p:nvSpPr>
-          <p:cNvPr id="132" name="Text 3"/>
+          <p:cNvPr id="108" name="Text 3"/>
           <p:cNvSpPr/>
           <p:nvPr/>
         </p:nvSpPr>
         <p:spPr>
           <a:xfrm>
             <a:off x="640080" y="2331720"/>
-            <a:ext cx="7863480" cy="456840"/>
+            <a:ext cx="7862760" cy="456120"/>
           </a:xfrm>
           <a:prstGeom prst="rect">
             <a:avLst/>
@@ -4043,14 +2805,14 @@
       </p:sp>
       <p:sp>
         <p:nvSpPr>
-          <p:cNvPr id="133" name="Text 4"/>
+          <p:cNvPr id="109" name="Text 4"/>
           <p:cNvSpPr/>
           <p:nvPr/>
         </p:nvSpPr>
         <p:spPr>
           <a:xfrm>
             <a:off x="640080" y="3291840"/>
-            <a:ext cx="7863480" cy="319680"/>
+            <a:ext cx="7862760" cy="318960"/>
           </a:xfrm>
           <a:prstGeom prst="rect">
             <a:avLst/>
@@ -4104,14 +2866,14 @@
       </p:sp>
       <p:sp>
         <p:nvSpPr>
-          <p:cNvPr id="134" name="Text 5"/>
+          <p:cNvPr id="110" name="Text 5"/>
           <p:cNvSpPr/>
           <p:nvPr/>
         </p:nvSpPr>
         <p:spPr>
           <a:xfrm>
             <a:off x="640080" y="3703320"/>
-            <a:ext cx="7863480" cy="273960"/>
+            <a:ext cx="7862760" cy="273240"/>
           </a:xfrm>
           <a:prstGeom prst="rect">
             <a:avLst/>
@@ -4209,7 +2971,7 @@
         <p:spPr>
           <a:xfrm>
             <a:off x="502920" y="201240"/>
-            <a:ext cx="8229240" cy="292320"/>
+            <a:ext cx="8228520" cy="291600"/>
           </a:xfrm>
           <a:prstGeom prst="rect">
             <a:avLst/>
@@ -4269,7 +3031,7 @@
         <p:spPr>
           <a:xfrm>
             <a:off x="502920" y="530280"/>
-            <a:ext cx="7772040" cy="639720"/>
+            <a:ext cx="7771320" cy="639000"/>
           </a:xfrm>
           <a:prstGeom prst="rect">
             <a:avLst/>
@@ -4373,7 +3135,7 @@
         <p:spPr>
           <a:xfrm>
             <a:off x="365760" y="1417320"/>
-            <a:ext cx="2651400" cy="3291480"/>
+            <a:ext cx="2650680" cy="3290760"/>
           </a:xfrm>
           <a:prstGeom prst="roundRect">
             <a:avLst>
@@ -4408,6 +3170,11 @@
             <a:noAutofit/>
           </a:bodyPr>
           <a:p>
+            <a:pPr>
+              <a:lnSpc>
+                <a:spcPct val="100000"/>
+              </a:lnSpc>
+            </a:pPr>
             <a:endParaRPr b="0" lang="en-US" sz="1800" strike="noStrike" u="none">
               <a:solidFill>
                 <a:srgbClr val="000000"/>
@@ -4428,7 +3195,7 @@
         <p:spPr>
           <a:xfrm>
             <a:off x="548640" y="1600200"/>
-            <a:ext cx="548280" cy="548280"/>
+            <a:ext cx="547560" cy="547560"/>
           </a:xfrm>
           <a:prstGeom prst="rect">
             <a:avLst/>
@@ -4488,7 +3255,7 @@
         <p:spPr>
           <a:xfrm>
             <a:off x="502920" y="2240280"/>
-            <a:ext cx="2377080" cy="365400"/>
+            <a:ext cx="2376360" cy="364680"/>
           </a:xfrm>
           <a:prstGeom prst="rect">
             <a:avLst/>
@@ -4549,7 +3316,7 @@
         <p:spPr>
           <a:xfrm>
             <a:off x="502920" y="2670120"/>
-            <a:ext cx="2377080" cy="1828440"/>
+            <a:ext cx="2376360" cy="1827720"/>
           </a:xfrm>
           <a:prstGeom prst="rect">
             <a:avLst/>
@@ -4610,7 +3377,7 @@
         <p:spPr>
           <a:xfrm>
             <a:off x="3200400" y="1417320"/>
-            <a:ext cx="2651400" cy="3291480"/>
+            <a:ext cx="2650680" cy="3290760"/>
           </a:xfrm>
           <a:prstGeom prst="roundRect">
             <a:avLst>
@@ -4645,6 +3412,11 @@
             <a:noAutofit/>
           </a:bodyPr>
           <a:p>
+            <a:pPr>
+              <a:lnSpc>
+                <a:spcPct val="100000"/>
+              </a:lnSpc>
+            </a:pPr>
             <a:endParaRPr b="0" lang="en-US" sz="1800" strike="noStrike" u="none">
               <a:solidFill>
                 <a:srgbClr val="000000"/>
@@ -4665,7 +3437,7 @@
         <p:spPr>
           <a:xfrm>
             <a:off x="3383280" y="1600200"/>
-            <a:ext cx="548280" cy="548280"/>
+            <a:ext cx="547560" cy="547560"/>
           </a:xfrm>
           <a:prstGeom prst="rect">
             <a:avLst/>
@@ -4725,7 +3497,7 @@
         <p:spPr>
           <a:xfrm>
             <a:off x="3337560" y="2240280"/>
-            <a:ext cx="2377080" cy="365400"/>
+            <a:ext cx="2376360" cy="364680"/>
           </a:xfrm>
           <a:prstGeom prst="rect">
             <a:avLst/>
@@ -4786,7 +3558,7 @@
         <p:spPr>
           <a:xfrm>
             <a:off x="3337560" y="2670120"/>
-            <a:ext cx="2377080" cy="1828440"/>
+            <a:ext cx="2376360" cy="1827720"/>
           </a:xfrm>
           <a:prstGeom prst="rect">
             <a:avLst/>
@@ -4847,7 +3619,7 @@
         <p:spPr>
           <a:xfrm>
             <a:off x="6035040" y="1417320"/>
-            <a:ext cx="2651400" cy="3291480"/>
+            <a:ext cx="2650680" cy="3290760"/>
           </a:xfrm>
           <a:prstGeom prst="roundRect">
             <a:avLst>
@@ -4882,6 +3654,11 @@
             <a:noAutofit/>
           </a:bodyPr>
           <a:p>
+            <a:pPr>
+              <a:lnSpc>
+                <a:spcPct val="100000"/>
+              </a:lnSpc>
+            </a:pPr>
             <a:endParaRPr b="0" lang="en-US" sz="1800" strike="noStrike" u="none">
               <a:solidFill>
                 <a:srgbClr val="000000"/>
@@ -4902,7 +3679,7 @@
         <p:spPr>
           <a:xfrm>
             <a:off x="6217920" y="1600200"/>
-            <a:ext cx="548280" cy="548280"/>
+            <a:ext cx="547560" cy="547560"/>
           </a:xfrm>
           <a:prstGeom prst="rect">
             <a:avLst/>
@@ -4962,7 +3739,7 @@
         <p:spPr>
           <a:xfrm>
             <a:off x="6172200" y="2240280"/>
-            <a:ext cx="2377080" cy="365400"/>
+            <a:ext cx="2376360" cy="364680"/>
           </a:xfrm>
           <a:prstGeom prst="rect">
             <a:avLst/>
@@ -5023,7 +3800,7 @@
         <p:spPr>
           <a:xfrm>
             <a:off x="6172200" y="2670120"/>
-            <a:ext cx="2377080" cy="1828440"/>
+            <a:ext cx="2376360" cy="1827720"/>
           </a:xfrm>
           <a:prstGeom prst="rect">
             <a:avLst/>
@@ -5121,7 +3898,7 @@
         <p:spPr>
           <a:xfrm>
             <a:off x="502920" y="201240"/>
-            <a:ext cx="8229240" cy="292320"/>
+            <a:ext cx="8228520" cy="291600"/>
           </a:xfrm>
           <a:prstGeom prst="rect">
             <a:avLst/>
@@ -5181,7 +3958,7 @@
         <p:spPr>
           <a:xfrm>
             <a:off x="502920" y="530280"/>
-            <a:ext cx="7772040" cy="639720"/>
+            <a:ext cx="7771320" cy="639000"/>
           </a:xfrm>
           <a:prstGeom prst="rect">
             <a:avLst/>
@@ -5220,7 +3997,7 @@
                 <a:latin typeface="Cambria"/>
                 <a:ea typeface="Cambria"/>
               </a:rPr>
-              <a:t>Ce qu'on devait livrer</a:t>
+              <a:t>Présenation de la platfome</a:t>
             </a:r>
             <a:endParaRPr b="0" lang="en-US" sz="3000" strike="noStrike" u="none">
               <a:solidFill>
@@ -5285,7 +4062,7 @@
         <p:spPr>
           <a:xfrm>
             <a:off x="365760" y="1417320"/>
-            <a:ext cx="4114440" cy="3382920"/>
+            <a:ext cx="4113720" cy="3382200"/>
           </a:xfrm>
           <a:prstGeom prst="roundRect">
             <a:avLst>
@@ -5320,6 +4097,11 @@
             <a:noAutofit/>
           </a:bodyPr>
           <a:p>
+            <a:pPr>
+              <a:lnSpc>
+                <a:spcPct val="100000"/>
+              </a:lnSpc>
+            </a:pPr>
             <a:endParaRPr b="0" lang="en-US" sz="1800" strike="noStrike" u="none">
               <a:solidFill>
                 <a:srgbClr val="000000"/>
@@ -5340,7 +4122,7 @@
         <p:spPr>
           <a:xfrm>
             <a:off x="548640" y="1554480"/>
-            <a:ext cx="3748680" cy="365400"/>
+            <a:ext cx="3747960" cy="364680"/>
           </a:xfrm>
           <a:prstGeom prst="rect">
             <a:avLst/>
@@ -5401,7 +4183,7 @@
         <p:spPr>
           <a:xfrm>
             <a:off x="548640" y="2011680"/>
-            <a:ext cx="3657240" cy="273960"/>
+            <a:ext cx="3656520" cy="273240"/>
           </a:xfrm>
           <a:prstGeom prst="rect">
             <a:avLst/>
@@ -5462,7 +4244,7 @@
         <p:spPr>
           <a:xfrm>
             <a:off x="548640" y="2286000"/>
-            <a:ext cx="3657240" cy="319680"/>
+            <a:ext cx="3656520" cy="318960"/>
           </a:xfrm>
           <a:prstGeom prst="rect">
             <a:avLst/>
@@ -5523,7 +4305,7 @@
         <p:spPr>
           <a:xfrm>
             <a:off x="548640" y="2697480"/>
-            <a:ext cx="3657240" cy="273960"/>
+            <a:ext cx="3656520" cy="273240"/>
           </a:xfrm>
           <a:prstGeom prst="rect">
             <a:avLst/>
@@ -5584,7 +4366,7 @@
         <p:spPr>
           <a:xfrm>
             <a:off x="548640" y="2971800"/>
-            <a:ext cx="3657240" cy="319680"/>
+            <a:ext cx="3656520" cy="318960"/>
           </a:xfrm>
           <a:prstGeom prst="rect">
             <a:avLst/>
@@ -5645,7 +4427,7 @@
         <p:spPr>
           <a:xfrm>
             <a:off x="548640" y="3383280"/>
-            <a:ext cx="3657240" cy="273960"/>
+            <a:ext cx="3656520" cy="273240"/>
           </a:xfrm>
           <a:prstGeom prst="rect">
             <a:avLst/>
@@ -5706,7 +4488,7 @@
         <p:spPr>
           <a:xfrm>
             <a:off x="548640" y="3657600"/>
-            <a:ext cx="3657240" cy="319680"/>
+            <a:ext cx="3656520" cy="318960"/>
           </a:xfrm>
           <a:prstGeom prst="rect">
             <a:avLst/>
@@ -5767,7 +4549,7 @@
         <p:spPr>
           <a:xfrm>
             <a:off x="548640" y="4069080"/>
-            <a:ext cx="3657240" cy="273960"/>
+            <a:ext cx="3656520" cy="273240"/>
           </a:xfrm>
           <a:prstGeom prst="rect">
             <a:avLst/>
@@ -5828,7 +4610,7 @@
         <p:spPr>
           <a:xfrm>
             <a:off x="548640" y="4343400"/>
-            <a:ext cx="3657240" cy="319680"/>
+            <a:ext cx="3656520" cy="318960"/>
           </a:xfrm>
           <a:prstGeom prst="rect">
             <a:avLst/>
@@ -5889,7 +4671,7 @@
         <p:spPr>
           <a:xfrm>
             <a:off x="4754880" y="1417320"/>
-            <a:ext cx="4023000" cy="3382920"/>
+            <a:ext cx="4022280" cy="3382200"/>
           </a:xfrm>
           <a:prstGeom prst="roundRect">
             <a:avLst>
@@ -5924,6 +4706,11 @@
             <a:noAutofit/>
           </a:bodyPr>
           <a:p>
+            <a:pPr>
+              <a:lnSpc>
+                <a:spcPct val="100000"/>
+              </a:lnSpc>
+            </a:pPr>
             <a:endParaRPr b="0" lang="en-US" sz="1800" strike="noStrike" u="none">
               <a:solidFill>
                 <a:srgbClr val="000000"/>
@@ -5944,7 +4731,7 @@
         <p:spPr>
           <a:xfrm>
             <a:off x="4937760" y="1554480"/>
-            <a:ext cx="3657240" cy="365400"/>
+            <a:ext cx="3656520" cy="364680"/>
           </a:xfrm>
           <a:prstGeom prst="rect">
             <a:avLst/>
@@ -6005,7 +4792,7 @@
         <p:spPr>
           <a:xfrm>
             <a:off x="4937760" y="2011680"/>
-            <a:ext cx="3565800" cy="456840"/>
+            <a:ext cx="3565080" cy="456120"/>
           </a:xfrm>
           <a:prstGeom prst="rect">
             <a:avLst/>
@@ -6066,7 +4853,7 @@
         <p:spPr>
           <a:xfrm>
             <a:off x="4937760" y="2560320"/>
-            <a:ext cx="3565800" cy="456840"/>
+            <a:ext cx="3565080" cy="456120"/>
           </a:xfrm>
           <a:prstGeom prst="rect">
             <a:avLst/>
@@ -6127,7 +4914,7 @@
         <p:spPr>
           <a:xfrm>
             <a:off x="4937760" y="3108960"/>
-            <a:ext cx="3565800" cy="456840"/>
+            <a:ext cx="3565080" cy="456120"/>
           </a:xfrm>
           <a:prstGeom prst="rect">
             <a:avLst/>
@@ -6188,7 +4975,7 @@
         <p:spPr>
           <a:xfrm>
             <a:off x="4937760" y="3657600"/>
-            <a:ext cx="3565800" cy="456840"/>
+            <a:ext cx="3565080" cy="456120"/>
           </a:xfrm>
           <a:prstGeom prst="rect">
             <a:avLst/>
@@ -6249,7 +5036,7 @@
         <p:spPr>
           <a:xfrm>
             <a:off x="4937760" y="4206240"/>
-            <a:ext cx="3565800" cy="456840"/>
+            <a:ext cx="3565080" cy="456120"/>
           </a:xfrm>
           <a:prstGeom prst="rect">
             <a:avLst/>
@@ -6343,8 +5130,8 @@
         </p:blipFill>
         <p:spPr>
           <a:xfrm>
-            <a:off x="1371600" y="61200"/>
-            <a:ext cx="6172200" cy="5082480"/>
+            <a:off x="1168560" y="720"/>
+            <a:ext cx="6796080" cy="5142960"/>
           </a:xfrm>
           <a:prstGeom prst="rect">
             <a:avLst/>
@@ -6398,7 +5185,7 @@
         <p:spPr>
           <a:xfrm>
             <a:off x="228600" y="0"/>
-            <a:ext cx="8686800" cy="5139360"/>
+            <a:ext cx="8686080" cy="5138640"/>
           </a:xfrm>
           <a:prstGeom prst="rect">
             <a:avLst/>
@@ -6455,7 +5242,7 @@
         <p:spPr>
           <a:xfrm>
             <a:off x="502920" y="201240"/>
-            <a:ext cx="8229240" cy="292320"/>
+            <a:ext cx="8228520" cy="291600"/>
           </a:xfrm>
           <a:prstGeom prst="rect">
             <a:avLst/>
@@ -6515,7 +5302,7 @@
         <p:spPr>
           <a:xfrm>
             <a:off x="502920" y="530280"/>
-            <a:ext cx="7772040" cy="639720"/>
+            <a:ext cx="7771320" cy="639000"/>
           </a:xfrm>
           <a:prstGeom prst="rect">
             <a:avLst/>
@@ -6619,7 +5406,7 @@
         <p:spPr>
           <a:xfrm>
             <a:off x="365760" y="1417320"/>
-            <a:ext cx="3931560" cy="3382920"/>
+            <a:ext cx="3930840" cy="3382200"/>
           </a:xfrm>
           <a:prstGeom prst="roundRect">
             <a:avLst>
@@ -6654,6 +5441,11 @@
             <a:noAutofit/>
           </a:bodyPr>
           <a:p>
+            <a:pPr>
+              <a:lnSpc>
+                <a:spcPct val="100000"/>
+              </a:lnSpc>
+            </a:pPr>
             <a:endParaRPr b="0" lang="en-US" sz="1800" strike="noStrike" u="none">
               <a:solidFill>
                 <a:srgbClr val="000000"/>
@@ -6674,7 +5466,7 @@
         <p:spPr>
           <a:xfrm>
             <a:off x="548640" y="1572840"/>
-            <a:ext cx="3565800" cy="319680"/>
+            <a:ext cx="3565080" cy="318960"/>
           </a:xfrm>
           <a:prstGeom prst="rect">
             <a:avLst/>
@@ -6735,7 +5527,7 @@
         <p:spPr>
           <a:xfrm>
             <a:off x="548640" y="1965960"/>
-            <a:ext cx="3565800" cy="255600"/>
+            <a:ext cx="3565080" cy="254880"/>
           </a:xfrm>
           <a:prstGeom prst="rect">
             <a:avLst/>
@@ -6796,7 +5588,7 @@
         <p:spPr>
           <a:xfrm>
             <a:off x="548640" y="2221920"/>
-            <a:ext cx="3565800" cy="237240"/>
+            <a:ext cx="3565080" cy="236520"/>
           </a:xfrm>
           <a:prstGeom prst="rect">
             <a:avLst/>
@@ -6857,7 +5649,7 @@
         <p:spPr>
           <a:xfrm>
             <a:off x="548640" y="2514600"/>
-            <a:ext cx="3565800" cy="255600"/>
+            <a:ext cx="3565080" cy="254880"/>
           </a:xfrm>
           <a:prstGeom prst="rect">
             <a:avLst/>
@@ -6918,7 +5710,7 @@
         <p:spPr>
           <a:xfrm>
             <a:off x="548640" y="2770560"/>
-            <a:ext cx="3565800" cy="237240"/>
+            <a:ext cx="3565080" cy="236520"/>
           </a:xfrm>
           <a:prstGeom prst="rect">
             <a:avLst/>
@@ -6979,7 +5771,7 @@
         <p:spPr>
           <a:xfrm>
             <a:off x="548640" y="3063240"/>
-            <a:ext cx="3565800" cy="255600"/>
+            <a:ext cx="3565080" cy="254880"/>
           </a:xfrm>
           <a:prstGeom prst="rect">
             <a:avLst/>
@@ -7040,7 +5832,7 @@
         <p:spPr>
           <a:xfrm>
             <a:off x="548640" y="3319200"/>
-            <a:ext cx="3565800" cy="237240"/>
+            <a:ext cx="3565080" cy="236520"/>
           </a:xfrm>
           <a:prstGeom prst="rect">
             <a:avLst/>
@@ -7101,7 +5893,7 @@
         <p:spPr>
           <a:xfrm>
             <a:off x="548640" y="3611880"/>
-            <a:ext cx="3565800" cy="255600"/>
+            <a:ext cx="3565080" cy="254880"/>
           </a:xfrm>
           <a:prstGeom prst="rect">
             <a:avLst/>
@@ -7162,7 +5954,7 @@
         <p:spPr>
           <a:xfrm>
             <a:off x="548640" y="3867840"/>
-            <a:ext cx="3565800" cy="237240"/>
+            <a:ext cx="3565080" cy="236520"/>
           </a:xfrm>
           <a:prstGeom prst="rect">
             <a:avLst/>
@@ -7223,7 +6015,7 @@
         <p:spPr>
           <a:xfrm>
             <a:off x="548640" y="4160520"/>
-            <a:ext cx="3565800" cy="255600"/>
+            <a:ext cx="3565080" cy="254880"/>
           </a:xfrm>
           <a:prstGeom prst="rect">
             <a:avLst/>
@@ -7284,7 +6076,7 @@
         <p:spPr>
           <a:xfrm>
             <a:off x="548640" y="4416480"/>
-            <a:ext cx="3565800" cy="237240"/>
+            <a:ext cx="3565080" cy="236520"/>
           </a:xfrm>
           <a:prstGeom prst="rect">
             <a:avLst/>
@@ -7345,7 +6137,7 @@
         <p:spPr>
           <a:xfrm>
             <a:off x="4526280" y="1417320"/>
-            <a:ext cx="4251600" cy="3382920"/>
+            <a:ext cx="4250880" cy="3382200"/>
           </a:xfrm>
           <a:prstGeom prst="roundRect">
             <a:avLst>
@@ -7380,6 +6172,11 @@
             <a:noAutofit/>
           </a:bodyPr>
           <a:p>
+            <a:pPr>
+              <a:lnSpc>
+                <a:spcPct val="100000"/>
+              </a:lnSpc>
+            </a:pPr>
             <a:endParaRPr b="0" lang="en-US" sz="1800" strike="noStrike" u="none">
               <a:solidFill>
                 <a:srgbClr val="000000"/>
@@ -7400,7 +6197,7 @@
         <p:spPr>
           <a:xfrm>
             <a:off x="4709160" y="1572840"/>
-            <a:ext cx="3840120" cy="319680"/>
+            <a:ext cx="3839400" cy="318960"/>
           </a:xfrm>
           <a:prstGeom prst="rect">
             <a:avLst/>
@@ -7461,7 +6258,7 @@
         <p:spPr>
           <a:xfrm>
             <a:off x="4754880" y="1993320"/>
-            <a:ext cx="3840120" cy="310680"/>
+            <a:ext cx="3839400" cy="309960"/>
           </a:xfrm>
           <a:prstGeom prst="rect">
             <a:avLst/>
@@ -7522,7 +6319,7 @@
         <p:spPr>
           <a:xfrm>
             <a:off x="4983480" y="2322720"/>
-            <a:ext cx="3840120" cy="310680"/>
+            <a:ext cx="3839400" cy="309960"/>
           </a:xfrm>
           <a:prstGeom prst="rect">
             <a:avLst/>
@@ -7583,7 +6380,7 @@
         <p:spPr>
           <a:xfrm>
             <a:off x="4983480" y="2651760"/>
-            <a:ext cx="3840120" cy="310680"/>
+            <a:ext cx="3839400" cy="309960"/>
           </a:xfrm>
           <a:prstGeom prst="rect">
             <a:avLst/>
@@ -7644,7 +6441,7 @@
         <p:spPr>
           <a:xfrm>
             <a:off x="4983480" y="2980800"/>
-            <a:ext cx="3840120" cy="310680"/>
+            <a:ext cx="3839400" cy="309960"/>
           </a:xfrm>
           <a:prstGeom prst="rect">
             <a:avLst/>
@@ -7705,7 +6502,7 @@
         <p:spPr>
           <a:xfrm>
             <a:off x="4983480" y="3310200"/>
-            <a:ext cx="3840120" cy="310680"/>
+            <a:ext cx="3839400" cy="309960"/>
           </a:xfrm>
           <a:prstGeom prst="rect">
             <a:avLst/>
@@ -7766,7 +6563,7 @@
         <p:spPr>
           <a:xfrm>
             <a:off x="4983480" y="3639240"/>
-            <a:ext cx="3840120" cy="310680"/>
+            <a:ext cx="3839400" cy="309960"/>
           </a:xfrm>
           <a:prstGeom prst="rect">
             <a:avLst/>
@@ -7827,7 +6624,7 @@
         <p:spPr>
           <a:xfrm>
             <a:off x="4983480" y="3968640"/>
-            <a:ext cx="3840120" cy="310680"/>
+            <a:ext cx="3839400" cy="309960"/>
           </a:xfrm>
           <a:prstGeom prst="rect">
             <a:avLst/>
@@ -7888,7 +6685,7 @@
         <p:spPr>
           <a:xfrm>
             <a:off x="4983480" y="4297680"/>
-            <a:ext cx="3840120" cy="310680"/>
+            <a:ext cx="3839400" cy="309960"/>
           </a:xfrm>
           <a:prstGeom prst="rect">
             <a:avLst/>
@@ -7986,7 +6783,7 @@
         <p:spPr>
           <a:xfrm>
             <a:off x="502920" y="201240"/>
-            <a:ext cx="8229240" cy="292320"/>
+            <a:ext cx="8228520" cy="291600"/>
           </a:xfrm>
           <a:prstGeom prst="rect">
             <a:avLst/>
@@ -8046,7 +6843,7 @@
         <p:spPr>
           <a:xfrm>
             <a:off x="502920" y="530280"/>
-            <a:ext cx="7772040" cy="639720"/>
+            <a:ext cx="7771320" cy="639000"/>
           </a:xfrm>
           <a:prstGeom prst="rect">
             <a:avLst/>
@@ -8150,7 +6947,7 @@
         <p:spPr>
           <a:xfrm>
             <a:off x="365760" y="1417320"/>
-            <a:ext cx="8412120" cy="804240"/>
+            <a:ext cx="8411400" cy="803520"/>
           </a:xfrm>
           <a:prstGeom prst="roundRect">
             <a:avLst>
@@ -8185,6 +6982,11 @@
             <a:noAutofit/>
           </a:bodyPr>
           <a:p>
+            <a:pPr>
+              <a:lnSpc>
+                <a:spcPct val="100000"/>
+              </a:lnSpc>
+            </a:pPr>
             <a:endParaRPr b="0" lang="en-US" sz="1800" strike="noStrike" u="none">
               <a:solidFill>
                 <a:srgbClr val="000000"/>
@@ -8205,7 +7007,7 @@
         <p:spPr>
           <a:xfrm>
             <a:off x="548640" y="1490400"/>
-            <a:ext cx="3200040" cy="273960"/>
+            <a:ext cx="3199320" cy="273240"/>
           </a:xfrm>
           <a:prstGeom prst="rect">
             <a:avLst/>
@@ -8266,7 +7068,7 @@
         <p:spPr>
           <a:xfrm>
             <a:off x="3657600" y="1490400"/>
-            <a:ext cx="4937400" cy="594000"/>
+            <a:ext cx="4936680" cy="593280"/>
           </a:xfrm>
           <a:prstGeom prst="rect">
             <a:avLst/>
@@ -8370,7 +7172,7 @@
         <p:spPr>
           <a:xfrm>
             <a:off x="365760" y="2313360"/>
-            <a:ext cx="8412120" cy="804240"/>
+            <a:ext cx="8411400" cy="803520"/>
           </a:xfrm>
           <a:prstGeom prst="roundRect">
             <a:avLst>
@@ -8405,6 +7207,11 @@
             <a:noAutofit/>
           </a:bodyPr>
           <a:p>
+            <a:pPr>
+              <a:lnSpc>
+                <a:spcPct val="100000"/>
+              </a:lnSpc>
+            </a:pPr>
             <a:endParaRPr b="0" lang="en-US" sz="1800" strike="noStrike" u="none">
               <a:solidFill>
                 <a:srgbClr val="000000"/>
@@ -8425,7 +7232,7 @@
         <p:spPr>
           <a:xfrm>
             <a:off x="548640" y="2386440"/>
-            <a:ext cx="3200040" cy="273960"/>
+            <a:ext cx="3199320" cy="273240"/>
           </a:xfrm>
           <a:prstGeom prst="rect">
             <a:avLst/>
@@ -8486,7 +7293,7 @@
         <p:spPr>
           <a:xfrm>
             <a:off x="3657600" y="2386440"/>
-            <a:ext cx="4937400" cy="594000"/>
+            <a:ext cx="4936680" cy="593280"/>
           </a:xfrm>
           <a:prstGeom prst="rect">
             <a:avLst/>
@@ -8507,6 +7314,11 @@
             <a:noAutofit/>
           </a:bodyPr>
           <a:p>
+            <a:pPr>
+              <a:lnSpc>
+                <a:spcPct val="100000"/>
+              </a:lnSpc>
+            </a:pPr>
             <a:r>
               <a:rPr b="0" lang="en-US" sz="1150" strike="noStrike" u="none">
                 <a:solidFill>
@@ -8582,7 +7394,7 @@
         <p:spPr>
           <a:xfrm>
             <a:off x="365760" y="3209400"/>
-            <a:ext cx="8412120" cy="804240"/>
+            <a:ext cx="8411400" cy="803520"/>
           </a:xfrm>
           <a:prstGeom prst="roundRect">
             <a:avLst>
@@ -8617,6 +7429,11 @@
             <a:noAutofit/>
           </a:bodyPr>
           <a:p>
+            <a:pPr>
+              <a:lnSpc>
+                <a:spcPct val="100000"/>
+              </a:lnSpc>
+            </a:pPr>
             <a:endParaRPr b="0" lang="en-US" sz="1800" strike="noStrike" u="none">
               <a:solidFill>
                 <a:srgbClr val="000000"/>
@@ -8637,7 +7454,7 @@
         <p:spPr>
           <a:xfrm>
             <a:off x="548640" y="3282840"/>
-            <a:ext cx="3200040" cy="273960"/>
+            <a:ext cx="3199320" cy="273240"/>
           </a:xfrm>
           <a:prstGeom prst="rect">
             <a:avLst/>
@@ -8698,7 +7515,7 @@
         <p:spPr>
           <a:xfrm>
             <a:off x="3657600" y="3282840"/>
-            <a:ext cx="4937400" cy="594000"/>
+            <a:ext cx="4936680" cy="593280"/>
           </a:xfrm>
           <a:prstGeom prst="rect">
             <a:avLst/>
@@ -8839,7 +7656,7 @@
         <p:spPr>
           <a:xfrm>
             <a:off x="0" y="0"/>
-            <a:ext cx="9143640" cy="54360"/>
+            <a:ext cx="9142920" cy="53640"/>
           </a:xfrm>
           <a:prstGeom prst="rect">
             <a:avLst/>
@@ -8865,6 +7682,11 @@
             <a:noAutofit/>
           </a:bodyPr>
           <a:p>
+            <a:pPr>
+              <a:lnSpc>
+                <a:spcPct val="100000"/>
+              </a:lnSpc>
+            </a:pPr>
             <a:endParaRPr b="0" lang="en-US" sz="1800" strike="noStrike" u="none">
               <a:solidFill>
                 <a:srgbClr val="000000"/>
@@ -8885,7 +7707,7 @@
         <p:spPr>
           <a:xfrm>
             <a:off x="0" y="1280160"/>
-            <a:ext cx="9143640" cy="1096920"/>
+            <a:ext cx="9142920" cy="1096200"/>
           </a:xfrm>
           <a:prstGeom prst="rect">
             <a:avLst/>
@@ -8945,7 +7767,7 @@
         <p:spPr>
           <a:xfrm>
             <a:off x="640080" y="2468880"/>
-            <a:ext cx="7863480" cy="731160"/>
+            <a:ext cx="7862760" cy="730440"/>
           </a:xfrm>
           <a:prstGeom prst="rect">
             <a:avLst/>
@@ -9006,7 +7828,7 @@
         <p:spPr>
           <a:xfrm>
             <a:off x="640080" y="3291840"/>
-            <a:ext cx="7863480" cy="365400"/>
+            <a:ext cx="7862760" cy="364680"/>
           </a:xfrm>
           <a:prstGeom prst="rect">
             <a:avLst/>
@@ -9104,7 +7926,7 @@
         <p:spPr>
           <a:xfrm>
             <a:off x="502920" y="201240"/>
-            <a:ext cx="8229240" cy="292320"/>
+            <a:ext cx="8228520" cy="291600"/>
           </a:xfrm>
           <a:prstGeom prst="rect">
             <a:avLst/>
@@ -9164,7 +7986,7 @@
         <p:spPr>
           <a:xfrm>
             <a:off x="502920" y="530280"/>
-            <a:ext cx="7772040" cy="639720"/>
+            <a:ext cx="7771320" cy="639000"/>
           </a:xfrm>
           <a:prstGeom prst="rect">
             <a:avLst/>
@@ -9189,6 +8011,12 @@
               <a:lnSpc>
                 <a:spcPct val="100000"/>
               </a:lnSpc>
+              <a:spcBef>
+                <a:spcPts val="1191"/>
+              </a:spcBef>
+              <a:spcAft>
+                <a:spcPts val="992"/>
+              </a:spcAft>
               <a:tabLst>
                 <a:tab algn="l" pos="0"/>
               </a:tabLst>
@@ -9203,7 +8031,7 @@
                 <a:latin typeface="Cambria"/>
                 <a:ea typeface="Cambria"/>
               </a:rPr>
-              <a:t>Ce qu'on a livré — et la suite</a:t>
+              <a:t>Perspectives futures</a:t>
             </a:r>
             <a:endParaRPr b="0" lang="en-US" sz="3000" strike="noStrike" u="none">
               <a:solidFill>
@@ -9261,18 +8089,18 @@
       </p:sp>
       <p:sp>
         <p:nvSpPr>
-          <p:cNvPr id="99" name="Shape 3"/>
-          <p:cNvSpPr/>
-          <p:nvPr/>
-        </p:nvSpPr>
-        <p:spPr>
-          <a:xfrm>
-            <a:off x="365760" y="1417320"/>
-            <a:ext cx="8412120" cy="1874160"/>
+          <p:cNvPr id="99" name="Shape 9"/>
+          <p:cNvSpPr/>
+          <p:nvPr/>
+        </p:nvSpPr>
+        <p:spPr>
+          <a:xfrm>
+            <a:off x="275040" y="1828800"/>
+            <a:ext cx="8411400" cy="2057040"/>
           </a:xfrm>
           <a:prstGeom prst="roundRect">
             <a:avLst>
-              <a:gd name="adj" fmla="val 5854"/>
+              <a:gd name="adj" fmla="val 8000"/>
             </a:avLst>
           </a:prstGeom>
           <a:solidFill>
@@ -9303,6 +8131,11 @@
             <a:noAutofit/>
           </a:bodyPr>
           <a:p>
+            <a:pPr>
+              <a:lnSpc>
+                <a:spcPct val="100000"/>
+              </a:lnSpc>
+            </a:pPr>
             <a:endParaRPr b="0" lang="en-US" sz="1800" strike="noStrike" u="none">
               <a:solidFill>
                 <a:srgbClr val="000000"/>
@@ -9316,14 +8149,14 @@
       </p:sp>
       <p:sp>
         <p:nvSpPr>
-          <p:cNvPr id="100" name="Text 4"/>
-          <p:cNvSpPr/>
-          <p:nvPr/>
-        </p:nvSpPr>
-        <p:spPr>
-          <a:xfrm>
-            <a:off x="548640" y="1536120"/>
-            <a:ext cx="8046360" cy="319680"/>
+          <p:cNvPr id="100" name="Text 10"/>
+          <p:cNvSpPr/>
+          <p:nvPr/>
+        </p:nvSpPr>
+        <p:spPr>
+          <a:xfrm>
+            <a:off x="412200" y="2195280"/>
+            <a:ext cx="8045640" cy="318960"/>
           </a:xfrm>
           <a:prstGeom prst="rect">
             <a:avLst/>
@@ -9352,39 +8185,88 @@
                 <a:tab algn="l" pos="0"/>
               </a:tabLst>
             </a:pPr>
-            <a:r>
-              <a:rPr b="1" lang="en-US" sz="1300" strike="noStrike" u="none">
-                <a:solidFill>
-                  <a:srgbClr val="2c3e50"/>
+            <a:endParaRPr b="0" lang="en-US" sz="1800" strike="noStrike" u="none">
+              <a:solidFill>
+                <a:srgbClr val="000000"/>
+              </a:solidFill>
+              <a:effectLst/>
+              <a:uFillTx/>
+              <a:latin typeface="Arial"/>
+            </a:endParaRPr>
+          </a:p>
+        </p:txBody>
+      </p:sp>
+      <p:sp>
+        <p:nvSpPr>
+          <p:cNvPr id="101" name="Text 11"/>
+          <p:cNvSpPr/>
+          <p:nvPr/>
+        </p:nvSpPr>
+        <p:spPr>
+          <a:xfrm>
+            <a:off x="503640" y="2223000"/>
+            <a:ext cx="7954200" cy="291600"/>
+          </a:xfrm>
+          <a:prstGeom prst="rect">
+            <a:avLst/>
+          </a:prstGeom>
+          <a:noFill/>
+          <a:ln w="0">
+            <a:noFill/>
+          </a:ln>
+        </p:spPr>
+        <p:style>
+          <a:lnRef idx="0"/>
+          <a:fillRef idx="0"/>
+          <a:effectRef idx="0"/>
+          <a:fontRef idx="minor"/>
+        </p:style>
+        <p:txBody>
+          <a:bodyPr lIns="0" rIns="0" tIns="0" bIns="0" anchor="ctr">
+            <a:noAutofit/>
+          </a:bodyPr>
+          <a:p>
+            <a:pPr defTabSz="914400">
+              <a:lnSpc>
+                <a:spcPct val="100000"/>
+              </a:lnSpc>
+              <a:tabLst>
+                <a:tab algn="l" pos="0"/>
+              </a:tabLst>
+            </a:pPr>
+            <a:r>
+              <a:rPr b="0" lang="en-US" sz="1150" strike="noStrike" u="none">
+                <a:solidFill>
+                  <a:srgbClr val="5d6d7e"/>
                 </a:solidFill>
                 <a:effectLst/>
                 <a:uFillTx/>
                 <a:latin typeface="Calibri"/>
                 <a:ea typeface="Calibri"/>
               </a:rPr>
-              <a:t>✅  Ce qui fonctionne</a:t>
-            </a:r>
-            <a:endParaRPr b="0" lang="en-US" sz="1300" strike="noStrike" u="none">
-              <a:solidFill>
-                <a:srgbClr val="000000"/>
-              </a:solidFill>
-              <a:effectLst/>
-              <a:uFillTx/>
-              <a:latin typeface="Arial"/>
-            </a:endParaRPr>
-          </a:p>
-        </p:txBody>
-      </p:sp>
-      <p:sp>
-        <p:nvSpPr>
-          <p:cNvPr id="101" name="Text 5"/>
-          <p:cNvSpPr/>
-          <p:nvPr/>
-        </p:nvSpPr>
-        <p:spPr>
-          <a:xfrm>
-            <a:off x="594360" y="1920240"/>
-            <a:ext cx="7954920" cy="273960"/>
+              <a:t>🔔  Notifications par mail à chaque nouvelle ressource</a:t>
+            </a:r>
+            <a:endParaRPr b="0" lang="en-US" sz="1150" strike="noStrike" u="none">
+              <a:solidFill>
+                <a:srgbClr val="000000"/>
+              </a:solidFill>
+              <a:effectLst/>
+              <a:uFillTx/>
+              <a:latin typeface="Arial"/>
+            </a:endParaRPr>
+          </a:p>
+        </p:txBody>
+      </p:sp>
+      <p:sp>
+        <p:nvSpPr>
+          <p:cNvPr id="102" name="Text 12"/>
+          <p:cNvSpPr/>
+          <p:nvPr/>
+        </p:nvSpPr>
+        <p:spPr>
+          <a:xfrm>
+            <a:off x="503640" y="2806560"/>
+            <a:ext cx="7954200" cy="291600"/>
           </a:xfrm>
           <a:prstGeom prst="rect">
             <a:avLst/>
@@ -9423,7 +8305,7 @@
                 <a:latin typeface="Calibri"/>
                 <a:ea typeface="Calibri"/>
               </a:rPr>
-              <a:t>· Authentification complète avec rôles (étudiant, enseignant, responsable, admin)</a:t>
+              <a:t>⚡  API REST (Django REST Framework) pour exposer les données</a:t>
             </a:r>
             <a:endParaRPr b="0" lang="en-US" sz="1150" strike="noStrike" u="none">
               <a:solidFill>
@@ -9438,14 +8320,14 @@
       </p:sp>
       <p:sp>
         <p:nvSpPr>
-          <p:cNvPr id="102" name="Text 6"/>
-          <p:cNvSpPr/>
-          <p:nvPr/>
-        </p:nvSpPr>
-        <p:spPr>
-          <a:xfrm>
-            <a:off x="594360" y="2221920"/>
-            <a:ext cx="7954920" cy="273960"/>
+          <p:cNvPr id="103" name="Text 13"/>
+          <p:cNvSpPr/>
+          <p:nvPr/>
+        </p:nvSpPr>
+        <p:spPr>
+          <a:xfrm>
+            <a:off x="503640" y="3098520"/>
+            <a:ext cx="7954200" cy="291600"/>
           </a:xfrm>
           <a:prstGeom prst="rect">
             <a:avLst/>
@@ -9484,7 +8366,7 @@
                 <a:latin typeface="Calibri"/>
                 <a:ea typeface="Calibri"/>
               </a:rPr>
-              <a:t>· Upload / téléchargement de ressources par module et par classe</a:t>
+              <a:t>⚛️  Front-end React pour une expérience plus dynamique</a:t>
             </a:r>
             <a:endParaRPr b="0" lang="en-US" sz="1150" strike="noStrike" u="none">
               <a:solidFill>
@@ -9499,14 +8381,14 @@
       </p:sp>
       <p:sp>
         <p:nvSpPr>
-          <p:cNvPr id="103" name="Text 7"/>
-          <p:cNvSpPr/>
-          <p:nvPr/>
-        </p:nvSpPr>
-        <p:spPr>
-          <a:xfrm>
-            <a:off x="594360" y="2523600"/>
-            <a:ext cx="7954920" cy="273960"/>
+          <p:cNvPr id="104" name="Text 25"/>
+          <p:cNvSpPr/>
+          <p:nvPr/>
+        </p:nvSpPr>
+        <p:spPr>
+          <a:xfrm>
+            <a:off x="503640" y="2514600"/>
+            <a:ext cx="7954200" cy="291600"/>
           </a:xfrm>
           <a:prstGeom prst="rect">
             <a:avLst/>
@@ -9536,66 +8418,17 @@
               </a:tabLst>
             </a:pPr>
             <a:r>
-              <a:rPr b="0" lang="en-US" sz="1150" strike="noStrike" u="none">
-                <a:solidFill>
-                  <a:srgbClr val="5d6d7e"/>
+              <a:rPr b="1" lang="en-US" sz="1200" strike="noStrike" u="none">
+                <a:solidFill>
+                  <a:srgbClr val="2c3e50"/>
                 </a:solidFill>
                 <a:effectLst/>
                 <a:uFillTx/>
                 <a:latin typeface="Calibri"/>
                 <a:ea typeface="Calibri"/>
               </a:rPr>
-              <a:t>· Tableau de bord admin avec gestion des inscriptions et statistiques</a:t>
-            </a:r>
-            <a:endParaRPr b="0" lang="en-US" sz="1150" strike="noStrike" u="none">
-              <a:solidFill>
-                <a:srgbClr val="000000"/>
-              </a:solidFill>
-              <a:effectLst/>
-              <a:uFillTx/>
-              <a:latin typeface="Arial"/>
-            </a:endParaRPr>
-          </a:p>
-        </p:txBody>
-      </p:sp>
-      <p:sp>
-        <p:nvSpPr>
-          <p:cNvPr id="104" name="Text 8"/>
-          <p:cNvSpPr/>
-          <p:nvPr/>
-        </p:nvSpPr>
-        <p:spPr>
-          <a:xfrm>
-            <a:off x="594360" y="2825640"/>
-            <a:ext cx="7954920" cy="273960"/>
-          </a:xfrm>
-          <a:prstGeom prst="rect">
-            <a:avLst/>
-          </a:prstGeom>
-          <a:noFill/>
-          <a:ln w="0">
-            <a:noFill/>
-          </a:ln>
-        </p:spPr>
-        <p:style>
-          <a:lnRef idx="0"/>
-          <a:fillRef idx="0"/>
-          <a:effectRef idx="0"/>
-          <a:fontRef idx="minor"/>
-        </p:style>
-        <p:txBody>
-          <a:bodyPr lIns="0" rIns="0" tIns="0" bIns="0" anchor="ctr">
-            <a:noAutofit/>
-          </a:bodyPr>
-          <a:p>
-            <a:pPr defTabSz="914400">
-              <a:lnSpc>
-                <a:spcPct val="100000"/>
-              </a:lnSpc>
-              <a:tabLst>
-                <a:tab algn="l" pos="0"/>
-              </a:tabLst>
-            </a:pPr>
+              <a:t>💬</a:t>
+            </a:r>
             <a:r>
               <a:rPr b="0" lang="en-US" sz="1150" strike="noStrike" u="none">
                 <a:solidFill>
@@ -9606,306 +8439,7 @@
                 <a:latin typeface="Calibri"/>
                 <a:ea typeface="Calibri"/>
               </a:rPr>
-              <a:t>· Annonces de classe · Historique d'accès · Interface responsive Bootstrap 5</a:t>
-            </a:r>
-            <a:endParaRPr b="0" lang="en-US" sz="1150" strike="noStrike" u="none">
-              <a:solidFill>
-                <a:srgbClr val="000000"/>
-              </a:solidFill>
-              <a:effectLst/>
-              <a:uFillTx/>
-              <a:latin typeface="Arial"/>
-            </a:endParaRPr>
-          </a:p>
-        </p:txBody>
-      </p:sp>
-      <p:sp>
-        <p:nvSpPr>
-          <p:cNvPr id="105" name="Shape 9"/>
-          <p:cNvSpPr/>
-          <p:nvPr/>
-        </p:nvSpPr>
-        <p:spPr>
-          <a:xfrm>
-            <a:off x="365760" y="3429000"/>
-            <a:ext cx="8412120" cy="1371240"/>
-          </a:xfrm>
-          <a:prstGeom prst="roundRect">
-            <a:avLst>
-              <a:gd name="adj" fmla="val 8000"/>
-            </a:avLst>
-          </a:prstGeom>
-          <a:solidFill>
-            <a:srgbClr val="ffffff"/>
-          </a:solidFill>
-          <a:ln w="6350">
-            <a:solidFill>
-              <a:srgbClr val="d5d8dc"/>
-            </a:solidFill>
-            <a:round/>
-          </a:ln>
-          <a:effectLst>
-            <a:outerShdw algn="bl" blurRad="101520" dir="2700000" dist="25455" kx="0" ky="0" rotWithShape="0" sx="100000" sy="100000">
-              <a:srgbClr val="000000">
-                <a:alpha val="8000"/>
-              </a:srgbClr>
-            </a:outerShdw>
-          </a:effectLst>
-        </p:spPr>
-        <p:style>
-          <a:lnRef idx="0"/>
-          <a:fillRef idx="0"/>
-          <a:effectRef idx="0"/>
-          <a:fontRef idx="minor"/>
-        </p:style>
-        <p:txBody>
-          <a:bodyPr lIns="90000" rIns="90000" tIns="45000" bIns="45000" anchor="t">
-            <a:noAutofit/>
-          </a:bodyPr>
-          <a:p>
-            <a:endParaRPr b="0" lang="en-US" sz="1800" strike="noStrike" u="none">
-              <a:solidFill>
-                <a:srgbClr val="000000"/>
-              </a:solidFill>
-              <a:effectLst/>
-              <a:uFillTx/>
-              <a:latin typeface="Arial"/>
-            </a:endParaRPr>
-          </a:p>
-        </p:txBody>
-      </p:sp>
-      <p:sp>
-        <p:nvSpPr>
-          <p:cNvPr id="106" name="Text 10"/>
-          <p:cNvSpPr/>
-          <p:nvPr/>
-        </p:nvSpPr>
-        <p:spPr>
-          <a:xfrm>
-            <a:off x="548640" y="3547800"/>
-            <a:ext cx="8046360" cy="319680"/>
-          </a:xfrm>
-          <a:prstGeom prst="rect">
-            <a:avLst/>
-          </a:prstGeom>
-          <a:noFill/>
-          <a:ln w="0">
-            <a:noFill/>
-          </a:ln>
-        </p:spPr>
-        <p:style>
-          <a:lnRef idx="0"/>
-          <a:fillRef idx="0"/>
-          <a:effectRef idx="0"/>
-          <a:fontRef idx="minor"/>
-        </p:style>
-        <p:txBody>
-          <a:bodyPr lIns="0" rIns="0" tIns="0" bIns="0" anchor="ctr">
-            <a:noAutofit/>
-          </a:bodyPr>
-          <a:p>
-            <a:pPr defTabSz="914400">
-              <a:lnSpc>
-                <a:spcPct val="100000"/>
-              </a:lnSpc>
-              <a:tabLst>
-                <a:tab algn="l" pos="0"/>
-              </a:tabLst>
-            </a:pPr>
-            <a:r>
-              <a:rPr b="1" lang="en-US" sz="1300" strike="noStrike" u="none">
-                <a:solidFill>
-                  <a:srgbClr val="2c3e50"/>
-                </a:solidFill>
-                <a:effectLst/>
-                <a:uFillTx/>
-                <a:latin typeface="Calibri"/>
-                <a:ea typeface="Calibri"/>
-              </a:rPr>
-              <a:t>🚀  La suite</a:t>
-            </a:r>
-            <a:endParaRPr b="0" lang="en-US" sz="1300" strike="noStrike" u="none">
-              <a:solidFill>
-                <a:srgbClr val="000000"/>
-              </a:solidFill>
-              <a:effectLst/>
-              <a:uFillTx/>
-              <a:latin typeface="Arial"/>
-            </a:endParaRPr>
-          </a:p>
-        </p:txBody>
-      </p:sp>
-      <p:sp>
-        <p:nvSpPr>
-          <p:cNvPr id="107" name="Text 11"/>
-          <p:cNvSpPr/>
-          <p:nvPr/>
-        </p:nvSpPr>
-        <p:spPr>
-          <a:xfrm>
-            <a:off x="594360" y="3931920"/>
-            <a:ext cx="7954920" cy="292320"/>
-          </a:xfrm>
-          <a:prstGeom prst="rect">
-            <a:avLst/>
-          </a:prstGeom>
-          <a:noFill/>
-          <a:ln w="0">
-            <a:noFill/>
-          </a:ln>
-        </p:spPr>
-        <p:style>
-          <a:lnRef idx="0"/>
-          <a:fillRef idx="0"/>
-          <a:effectRef idx="0"/>
-          <a:fontRef idx="minor"/>
-        </p:style>
-        <p:txBody>
-          <a:bodyPr lIns="0" rIns="0" tIns="0" bIns="0" anchor="ctr">
-            <a:noAutofit/>
-          </a:bodyPr>
-          <a:p>
-            <a:pPr defTabSz="914400">
-              <a:lnSpc>
-                <a:spcPct val="100000"/>
-              </a:lnSpc>
-              <a:tabLst>
-                <a:tab algn="l" pos="0"/>
-              </a:tabLst>
-            </a:pPr>
-            <a:r>
-              <a:rPr b="0" lang="en-US" sz="1150" strike="noStrike" u="none">
-                <a:solidFill>
-                  <a:srgbClr val="5d6d7e"/>
-                </a:solidFill>
-                <a:effectLst/>
-                <a:uFillTx/>
-                <a:latin typeface="Calibri"/>
-                <a:ea typeface="Calibri"/>
-              </a:rPr>
-              <a:t>🔔  Notifications par mail à chaque nouvelle ressource</a:t>
-            </a:r>
-            <a:endParaRPr b="0" lang="en-US" sz="1150" strike="noStrike" u="none">
-              <a:solidFill>
-                <a:srgbClr val="000000"/>
-              </a:solidFill>
-              <a:effectLst/>
-              <a:uFillTx/>
-              <a:latin typeface="Arial"/>
-            </a:endParaRPr>
-          </a:p>
-        </p:txBody>
-      </p:sp>
-      <p:sp>
-        <p:nvSpPr>
-          <p:cNvPr id="108" name="Text 12"/>
-          <p:cNvSpPr/>
-          <p:nvPr/>
-        </p:nvSpPr>
-        <p:spPr>
-          <a:xfrm>
-            <a:off x="594360" y="4251960"/>
-            <a:ext cx="7954920" cy="292320"/>
-          </a:xfrm>
-          <a:prstGeom prst="rect">
-            <a:avLst/>
-          </a:prstGeom>
-          <a:noFill/>
-          <a:ln w="0">
-            <a:noFill/>
-          </a:ln>
-        </p:spPr>
-        <p:style>
-          <a:lnRef idx="0"/>
-          <a:fillRef idx="0"/>
-          <a:effectRef idx="0"/>
-          <a:fontRef idx="minor"/>
-        </p:style>
-        <p:txBody>
-          <a:bodyPr lIns="0" rIns="0" tIns="0" bIns="0" anchor="ctr">
-            <a:noAutofit/>
-          </a:bodyPr>
-          <a:p>
-            <a:pPr defTabSz="914400">
-              <a:lnSpc>
-                <a:spcPct val="100000"/>
-              </a:lnSpc>
-              <a:tabLst>
-                <a:tab algn="l" pos="0"/>
-              </a:tabLst>
-            </a:pPr>
-            <a:r>
-              <a:rPr b="0" lang="en-US" sz="1150" strike="noStrike" u="none">
-                <a:solidFill>
-                  <a:srgbClr val="5d6d7e"/>
-                </a:solidFill>
-                <a:effectLst/>
-                <a:uFillTx/>
-                <a:latin typeface="Calibri"/>
-                <a:ea typeface="Calibri"/>
-              </a:rPr>
-              <a:t>⚡  API REST (Django REST Framework) pour exposer les données</a:t>
-            </a:r>
-            <a:endParaRPr b="0" lang="en-US" sz="1150" strike="noStrike" u="none">
-              <a:solidFill>
-                <a:srgbClr val="000000"/>
-              </a:solidFill>
-              <a:effectLst/>
-              <a:uFillTx/>
-              <a:latin typeface="Arial"/>
-            </a:endParaRPr>
-          </a:p>
-        </p:txBody>
-      </p:sp>
-      <p:sp>
-        <p:nvSpPr>
-          <p:cNvPr id="109" name="Text 13"/>
-          <p:cNvSpPr/>
-          <p:nvPr/>
-        </p:nvSpPr>
-        <p:spPr>
-          <a:xfrm>
-            <a:off x="594360" y="4572000"/>
-            <a:ext cx="7954920" cy="292320"/>
-          </a:xfrm>
-          <a:prstGeom prst="rect">
-            <a:avLst/>
-          </a:prstGeom>
-          <a:noFill/>
-          <a:ln w="0">
-            <a:noFill/>
-          </a:ln>
-        </p:spPr>
-        <p:style>
-          <a:lnRef idx="0"/>
-          <a:fillRef idx="0"/>
-          <a:effectRef idx="0"/>
-          <a:fontRef idx="minor"/>
-        </p:style>
-        <p:txBody>
-          <a:bodyPr lIns="0" rIns="0" tIns="0" bIns="0" anchor="ctr">
-            <a:noAutofit/>
-          </a:bodyPr>
-          <a:p>
-            <a:pPr defTabSz="914400">
-              <a:lnSpc>
-                <a:spcPct val="100000"/>
-              </a:lnSpc>
-              <a:tabLst>
-                <a:tab algn="l" pos="0"/>
-              </a:tabLst>
-            </a:pPr>
-            <a:r>
-              <a:rPr b="0" lang="en-US" sz="1150" strike="noStrike" u="none">
-                <a:solidFill>
-                  <a:srgbClr val="5d6d7e"/>
-                </a:solidFill>
-                <a:effectLst/>
-                <a:uFillTx/>
-                <a:latin typeface="Calibri"/>
-                <a:ea typeface="Calibri"/>
-              </a:rPr>
-              <a:t>⚛️  Front-end React pour une expérience plus dynamique</a:t>
+              <a:t>  Possibilité de commenter sous les ressources</a:t>
             </a:r>
             <a:endParaRPr b="0" lang="en-US" sz="1150" strike="noStrike" u="none">
               <a:solidFill>
